--- a/assets/figures-editable/c1-c2/c1-e05.pptx
+++ b/assets/figures-editable/c1-c2/c1-e05.pptx
@@ -7,7 +7,7 @@
   <p:sldIdLst>
     <p:sldId id="256" r:id="rId7"/>
   </p:sldIdLst>
-  <p:sldSz cx="11948160" cy="7924799" type="screen4x3"/>
+  <p:sldSz cx="12191695" cy="6858000" type="screen4x3"/>
   <p:notesSz cx="6858000" cy="9144000"/>
   <p:defaultTextStyle>
     <a:defPPr>
@@ -3098,14 +3098,14 @@
       <p:grpSpPr/>
       <p:sp>
         <p:nvSpPr>
-          <p:cNvPr id="2" name="text1" descr="sci-ppt:C1-E05-001"/>
+          <p:cNvPr id="2" name="C1-E05 text 0" descr="sci-ppt:o000"/>
           <p:cNvSpPr txBox="1"/>
           <p:nvPr/>
         </p:nvSpPr>
         <p:spPr>
           <a:xfrm>
-            <a:off x="316992" y="268224"/>
-            <a:ext cx="11277600" cy="359054"/>
+            <a:off x="274320" y="118872"/>
+            <a:ext cx="11612880" cy="340105"/>
           </a:xfrm>
           <a:prstGeom prst="rect">
             <a:avLst/>
@@ -3114,7 +3114,7 @@
           <a:effectLst/>
         </p:spPr>
         <p:txBody>
-          <a:bodyPr wrap="none" lIns="27432" rIns="27432" tIns="18288" bIns="18288" anchor="ctr">
+          <a:bodyPr wrap="none" lIns="18288" rIns="18288" tIns="18288" bIns="18288" anchor="t">
             <a:spAutoFit/>
           </a:bodyPr>
           <a:lstStyle/>
@@ -3125,83 +3125,2237 @@
               </a:spcAft>
             </a:pPr>
             <a:r>
-              <a:rPr sz="1823" b="0" i="0">
+              <a:rPr sz="1900" b="1" i="0">
                 <a:solidFill>
                   <a:srgbClr val="8EDBD4"/>
                 </a:solidFill>
                 <a:latin typeface="Arial"/>
               </a:rPr>
-              <a:t>C1-E05 | Physical-variable diagram</a:t>
-            </a:r>
-          </a:p>
-        </p:txBody>
-      </p:sp>
-      <p:sp>
-        <p:nvSpPr>
-          <p:cNvPr id="3" name="ellipse2" descr="sci-ppt:C1-E05-002"/>
+              <a:t>C1-E05 · Derived inertial pressure</a:t>
+            </a:r>
+          </a:p>
+        </p:txBody>
+      </p:sp>
+      <p:cxnSp>
+        <p:nvCxnSpPr>
+          <p:cNvPr id="3" name="C1-E05 line 1" descr="sci-ppt:o001"/>
+          <p:cNvCxnSpPr/>
+          <p:nvPr/>
+        </p:nvCxnSpPr>
+        <p:spPr>
+          <a:xfrm>
+            <a:off x="868680" y="5303520"/>
+            <a:ext cx="5394960" cy="0"/>
+          </a:xfrm>
+          <a:prstGeom prst="line">
+            <a:avLst/>
+          </a:prstGeom>
+          <a:ln w="19050">
+            <a:solidFill>
+              <a:srgbClr val="B4C7D2"/>
+            </a:solidFill>
+          </a:ln>
+          <a:effectLst/>
+        </p:spPr>
+      </p:cxnSp>
+      <p:cxnSp>
+        <p:nvCxnSpPr>
+          <p:cNvPr id="4" name="C1-E05 line 2" descr="sci-ppt:o002"/>
+          <p:cNvCxnSpPr/>
+          <p:nvPr/>
+        </p:nvCxnSpPr>
+        <p:spPr>
+          <a:xfrm>
+            <a:off x="868680" y="1371600"/>
+            <a:ext cx="0" cy="3931920"/>
+          </a:xfrm>
+          <a:prstGeom prst="line">
+            <a:avLst/>
+          </a:prstGeom>
+          <a:ln w="19050">
+            <a:solidFill>
+              <a:srgbClr val="B4C7D2"/>
+            </a:solidFill>
+          </a:ln>
+          <a:effectLst/>
+        </p:spPr>
+      </p:cxnSp>
+      <p:cxnSp>
+        <p:nvCxnSpPr>
+          <p:cNvPr id="5" name="C1-E05 line 3" descr="sci-ppt:o003"/>
+          <p:cNvCxnSpPr/>
+          <p:nvPr/>
+        </p:nvCxnSpPr>
+        <p:spPr>
+          <a:xfrm>
+            <a:off x="868680" y="5303520"/>
+            <a:ext cx="0" cy="64008"/>
+          </a:xfrm>
+          <a:prstGeom prst="line">
+            <a:avLst/>
+          </a:prstGeom>
+          <a:ln w="12700">
+            <a:solidFill>
+              <a:srgbClr val="B4C7D2"/>
+            </a:solidFill>
+          </a:ln>
+          <a:effectLst/>
+        </p:spPr>
+      </p:cxnSp>
+      <p:cxnSp>
+        <p:nvCxnSpPr>
+          <p:cNvPr id="6" name="C1-E05 line 4" descr="sci-ppt:o004"/>
+          <p:cNvCxnSpPr/>
+          <p:nvPr/>
+        </p:nvCxnSpPr>
+        <p:spPr>
+          <a:xfrm>
+            <a:off x="868680" y="1371600"/>
+            <a:ext cx="0" cy="3931920"/>
+          </a:xfrm>
+          <a:prstGeom prst="line">
+            <a:avLst/>
+          </a:prstGeom>
+          <a:ln w="7620">
+            <a:solidFill>
+              <a:srgbClr val="2E4756"/>
+            </a:solidFill>
+          </a:ln>
+          <a:effectLst/>
+        </p:spPr>
+      </p:cxnSp>
+      <p:sp>
+        <p:nvSpPr>
+          <p:cNvPr id="7" name="C1-E05 text 5" descr="sci-ppt:o005"/>
+          <p:cNvSpPr txBox="1"/>
+          <p:nvPr/>
+        </p:nvSpPr>
+        <p:spPr>
+          <a:xfrm>
+            <a:off x="411479" y="5385816"/>
+            <a:ext cx="914400" cy="208407"/>
+          </a:xfrm>
+          <a:prstGeom prst="rect">
+            <a:avLst/>
+          </a:prstGeom>
+          <a:noFill/>
+          <a:effectLst/>
+        </p:spPr>
+        <p:txBody>
+          <a:bodyPr wrap="none" lIns="18288" rIns="18288" tIns="18288" bIns="18288" anchor="t">
+            <a:spAutoFit/>
+          </a:bodyPr>
+          <a:lstStyle/>
+          <a:p>
+            <a:pPr algn="ctr">
+              <a:spcAft>
+                <a:spcPts val="0"/>
+              </a:spcAft>
+            </a:pPr>
+            <a:r>
+              <a:rPr sz="1050" b="0" i="0">
+                <a:solidFill>
+                  <a:srgbClr val="B4C7D2"/>
+                </a:solidFill>
+                <a:latin typeface="Arial"/>
+              </a:rPr>
+              <a:t>1</a:t>
+            </a:r>
+          </a:p>
+        </p:txBody>
+      </p:sp>
+      <p:cxnSp>
+        <p:nvCxnSpPr>
+          <p:cNvPr id="8" name="C1-E05 line 6" descr="sci-ppt:o006"/>
+          <p:cNvCxnSpPr/>
+          <p:nvPr/>
+        </p:nvCxnSpPr>
+        <p:spPr>
+          <a:xfrm>
+            <a:off x="2667000" y="5303520"/>
+            <a:ext cx="0" cy="64008"/>
+          </a:xfrm>
+          <a:prstGeom prst="line">
+            <a:avLst/>
+          </a:prstGeom>
+          <a:ln w="12700">
+            <a:solidFill>
+              <a:srgbClr val="B4C7D2"/>
+            </a:solidFill>
+          </a:ln>
+          <a:effectLst/>
+        </p:spPr>
+      </p:cxnSp>
+      <p:cxnSp>
+        <p:nvCxnSpPr>
+          <p:cNvPr id="9" name="C1-E05 line 7" descr="sci-ppt:o007"/>
+          <p:cNvCxnSpPr/>
+          <p:nvPr/>
+        </p:nvCxnSpPr>
+        <p:spPr>
+          <a:xfrm>
+            <a:off x="2667000" y="1371600"/>
+            <a:ext cx="0" cy="3931920"/>
+          </a:xfrm>
+          <a:prstGeom prst="line">
+            <a:avLst/>
+          </a:prstGeom>
+          <a:ln w="7620">
+            <a:solidFill>
+              <a:srgbClr val="2E4756"/>
+            </a:solidFill>
+          </a:ln>
+          <a:effectLst/>
+        </p:spPr>
+      </p:cxnSp>
+      <p:sp>
+        <p:nvSpPr>
+          <p:cNvPr id="10" name="C1-E05 text 8" descr="sci-ppt:o008"/>
+          <p:cNvSpPr txBox="1"/>
+          <p:nvPr/>
+        </p:nvSpPr>
+        <p:spPr>
+          <a:xfrm>
+            <a:off x="2209800" y="5385816"/>
+            <a:ext cx="914400" cy="208407"/>
+          </a:xfrm>
+          <a:prstGeom prst="rect">
+            <a:avLst/>
+          </a:prstGeom>
+          <a:noFill/>
+          <a:effectLst/>
+        </p:spPr>
+        <p:txBody>
+          <a:bodyPr wrap="none" lIns="18288" rIns="18288" tIns="18288" bIns="18288" anchor="t">
+            <a:spAutoFit/>
+          </a:bodyPr>
+          <a:lstStyle/>
+          <a:p>
+            <a:pPr algn="ctr">
+              <a:spcAft>
+                <a:spcPts val="0"/>
+              </a:spcAft>
+            </a:pPr>
+            <a:r>
+              <a:rPr sz="1050" b="0" i="0">
+                <a:solidFill>
+                  <a:srgbClr val="B4C7D2"/>
+                </a:solidFill>
+                <a:latin typeface="Arial"/>
+              </a:rPr>
+              <a:t>2</a:t>
+            </a:r>
+          </a:p>
+        </p:txBody>
+      </p:sp>
+      <p:cxnSp>
+        <p:nvCxnSpPr>
+          <p:cNvPr id="11" name="C1-E05 line 9" descr="sci-ppt:o009"/>
+          <p:cNvCxnSpPr/>
+          <p:nvPr/>
+        </p:nvCxnSpPr>
+        <p:spPr>
+          <a:xfrm>
+            <a:off x="4465320" y="5303520"/>
+            <a:ext cx="0" cy="64008"/>
+          </a:xfrm>
+          <a:prstGeom prst="line">
+            <a:avLst/>
+          </a:prstGeom>
+          <a:ln w="12700">
+            <a:solidFill>
+              <a:srgbClr val="B4C7D2"/>
+            </a:solidFill>
+          </a:ln>
+          <a:effectLst/>
+        </p:spPr>
+      </p:cxnSp>
+      <p:cxnSp>
+        <p:nvCxnSpPr>
+          <p:cNvPr id="12" name="C1-E05 line 10" descr="sci-ppt:o010"/>
+          <p:cNvCxnSpPr/>
+          <p:nvPr/>
+        </p:nvCxnSpPr>
+        <p:spPr>
+          <a:xfrm>
+            <a:off x="4465320" y="1371600"/>
+            <a:ext cx="0" cy="3931920"/>
+          </a:xfrm>
+          <a:prstGeom prst="line">
+            <a:avLst/>
+          </a:prstGeom>
+          <a:ln w="7620">
+            <a:solidFill>
+              <a:srgbClr val="2E4756"/>
+            </a:solidFill>
+          </a:ln>
+          <a:effectLst/>
+        </p:spPr>
+      </p:cxnSp>
+      <p:sp>
+        <p:nvSpPr>
+          <p:cNvPr id="13" name="C1-E05 text 11" descr="sci-ppt:o011"/>
+          <p:cNvSpPr txBox="1"/>
+          <p:nvPr/>
+        </p:nvSpPr>
+        <p:spPr>
+          <a:xfrm>
+            <a:off x="4008120" y="5385816"/>
+            <a:ext cx="914400" cy="208407"/>
+          </a:xfrm>
+          <a:prstGeom prst="rect">
+            <a:avLst/>
+          </a:prstGeom>
+          <a:noFill/>
+          <a:effectLst/>
+        </p:spPr>
+        <p:txBody>
+          <a:bodyPr wrap="none" lIns="18288" rIns="18288" tIns="18288" bIns="18288" anchor="t">
+            <a:spAutoFit/>
+          </a:bodyPr>
+          <a:lstStyle/>
+          <a:p>
+            <a:pPr algn="ctr">
+              <a:spcAft>
+                <a:spcPts val="0"/>
+              </a:spcAft>
+            </a:pPr>
+            <a:r>
+              <a:rPr sz="1050" b="0" i="0">
+                <a:solidFill>
+                  <a:srgbClr val="B4C7D2"/>
+                </a:solidFill>
+                <a:latin typeface="Arial"/>
+              </a:rPr>
+              <a:t>3</a:t>
+            </a:r>
+          </a:p>
+        </p:txBody>
+      </p:sp>
+      <p:cxnSp>
+        <p:nvCxnSpPr>
+          <p:cNvPr id="14" name="C1-E05 line 12" descr="sci-ppt:o012"/>
+          <p:cNvCxnSpPr/>
+          <p:nvPr/>
+        </p:nvCxnSpPr>
+        <p:spPr>
+          <a:xfrm>
+            <a:off x="6263640" y="5303520"/>
+            <a:ext cx="0" cy="64008"/>
+          </a:xfrm>
+          <a:prstGeom prst="line">
+            <a:avLst/>
+          </a:prstGeom>
+          <a:ln w="12700">
+            <a:solidFill>
+              <a:srgbClr val="B4C7D2"/>
+            </a:solidFill>
+          </a:ln>
+          <a:effectLst/>
+        </p:spPr>
+      </p:cxnSp>
+      <p:cxnSp>
+        <p:nvCxnSpPr>
+          <p:cNvPr id="15" name="C1-E05 line 13" descr="sci-ppt:o013"/>
+          <p:cNvCxnSpPr/>
+          <p:nvPr/>
+        </p:nvCxnSpPr>
+        <p:spPr>
+          <a:xfrm>
+            <a:off x="6263640" y="1371600"/>
+            <a:ext cx="0" cy="3931920"/>
+          </a:xfrm>
+          <a:prstGeom prst="line">
+            <a:avLst/>
+          </a:prstGeom>
+          <a:ln w="7620">
+            <a:solidFill>
+              <a:srgbClr val="2E4756"/>
+            </a:solidFill>
+          </a:ln>
+          <a:effectLst/>
+        </p:spPr>
+      </p:cxnSp>
+      <p:sp>
+        <p:nvSpPr>
+          <p:cNvPr id="16" name="C1-E05 text 14" descr="sci-ppt:o014"/>
+          <p:cNvSpPr txBox="1"/>
+          <p:nvPr/>
+        </p:nvSpPr>
+        <p:spPr>
+          <a:xfrm>
+            <a:off x="5806440" y="5385816"/>
+            <a:ext cx="914400" cy="208407"/>
+          </a:xfrm>
+          <a:prstGeom prst="rect">
+            <a:avLst/>
+          </a:prstGeom>
+          <a:noFill/>
+          <a:effectLst/>
+        </p:spPr>
+        <p:txBody>
+          <a:bodyPr wrap="none" lIns="18288" rIns="18288" tIns="18288" bIns="18288" anchor="t">
+            <a:spAutoFit/>
+          </a:bodyPr>
+          <a:lstStyle/>
+          <a:p>
+            <a:pPr algn="ctr">
+              <a:spcAft>
+                <a:spcPts val="0"/>
+              </a:spcAft>
+            </a:pPr>
+            <a:r>
+              <a:rPr sz="1050" b="0" i="0">
+                <a:solidFill>
+                  <a:srgbClr val="B4C7D2"/>
+                </a:solidFill>
+                <a:latin typeface="Arial"/>
+              </a:rPr>
+              <a:t>4</a:t>
+            </a:r>
+          </a:p>
+        </p:txBody>
+      </p:sp>
+      <p:cxnSp>
+        <p:nvCxnSpPr>
+          <p:cNvPr id="17" name="C1-E05 line 15" descr="sci-ppt:o015"/>
+          <p:cNvCxnSpPr/>
+          <p:nvPr/>
+        </p:nvCxnSpPr>
+        <p:spPr>
+          <a:xfrm>
+            <a:off x="804671" y="5303520"/>
+            <a:ext cx="64009" cy="0"/>
+          </a:xfrm>
+          <a:prstGeom prst="line">
+            <a:avLst/>
+          </a:prstGeom>
+          <a:ln w="12700">
+            <a:solidFill>
+              <a:srgbClr val="B4C7D2"/>
+            </a:solidFill>
+          </a:ln>
+          <a:effectLst/>
+        </p:spPr>
+      </p:cxnSp>
+      <p:cxnSp>
+        <p:nvCxnSpPr>
+          <p:cNvPr id="18" name="C1-E05 line 16" descr="sci-ppt:o016"/>
+          <p:cNvCxnSpPr/>
+          <p:nvPr/>
+        </p:nvCxnSpPr>
+        <p:spPr>
+          <a:xfrm>
+            <a:off x="804671" y="4517136"/>
+            <a:ext cx="64009" cy="0"/>
+          </a:xfrm>
+          <a:prstGeom prst="line">
+            <a:avLst/>
+          </a:prstGeom>
+          <a:ln w="12700">
+            <a:solidFill>
+              <a:srgbClr val="B4C7D2"/>
+            </a:solidFill>
+          </a:ln>
+          <a:effectLst/>
+        </p:spPr>
+      </p:cxnSp>
+      <p:cxnSp>
+        <p:nvCxnSpPr>
+          <p:cNvPr id="19" name="C1-E05 line 17" descr="sci-ppt:o017"/>
+          <p:cNvCxnSpPr/>
+          <p:nvPr/>
+        </p:nvCxnSpPr>
+        <p:spPr>
+          <a:xfrm>
+            <a:off x="868680" y="4517136"/>
+            <a:ext cx="5394960" cy="0"/>
+          </a:xfrm>
+          <a:prstGeom prst="line">
+            <a:avLst/>
+          </a:prstGeom>
+          <a:ln w="7620">
+            <a:solidFill>
+              <a:srgbClr val="2E4756"/>
+            </a:solidFill>
+          </a:ln>
+          <a:effectLst/>
+        </p:spPr>
+      </p:cxnSp>
+      <p:sp>
+        <p:nvSpPr>
+          <p:cNvPr id="20" name="C1-E05 text 18" descr="sci-ppt:o018"/>
+          <p:cNvSpPr txBox="1"/>
+          <p:nvPr/>
+        </p:nvSpPr>
+        <p:spPr>
+          <a:xfrm>
+            <a:off x="0" y="4434840"/>
+            <a:ext cx="777240" cy="208407"/>
+          </a:xfrm>
+          <a:prstGeom prst="rect">
+            <a:avLst/>
+          </a:prstGeom>
+          <a:noFill/>
+          <a:effectLst/>
+        </p:spPr>
+        <p:txBody>
+          <a:bodyPr wrap="none" lIns="18288" rIns="18288" tIns="18288" bIns="18288" anchor="t">
+            <a:spAutoFit/>
+          </a:bodyPr>
+          <a:lstStyle/>
+          <a:p>
+            <a:pPr algn="r">
+              <a:spcAft>
+                <a:spcPts val="0"/>
+              </a:spcAft>
+            </a:pPr>
+            <a:r>
+              <a:rPr sz="1050" b="0" i="0">
+                <a:solidFill>
+                  <a:srgbClr val="B4C7D2"/>
+                </a:solidFill>
+                <a:latin typeface="Arial"/>
+              </a:rPr>
+              <a:t>0</a:t>
+            </a:r>
+          </a:p>
+        </p:txBody>
+      </p:sp>
+      <p:cxnSp>
+        <p:nvCxnSpPr>
+          <p:cNvPr id="21" name="C1-E05 line 19" descr="sci-ppt:o019"/>
+          <p:cNvCxnSpPr/>
+          <p:nvPr/>
+        </p:nvCxnSpPr>
+        <p:spPr>
+          <a:xfrm>
+            <a:off x="804671" y="3730752"/>
+            <a:ext cx="64009" cy="0"/>
+          </a:xfrm>
+          <a:prstGeom prst="line">
+            <a:avLst/>
+          </a:prstGeom>
+          <a:ln w="12700">
+            <a:solidFill>
+              <a:srgbClr val="B4C7D2"/>
+            </a:solidFill>
+          </a:ln>
+          <a:effectLst/>
+        </p:spPr>
+      </p:cxnSp>
+      <p:cxnSp>
+        <p:nvCxnSpPr>
+          <p:cNvPr id="22" name="C1-E05 line 20" descr="sci-ppt:o020"/>
+          <p:cNvCxnSpPr/>
+          <p:nvPr/>
+        </p:nvCxnSpPr>
+        <p:spPr>
+          <a:xfrm>
+            <a:off x="868680" y="3730752"/>
+            <a:ext cx="5394960" cy="0"/>
+          </a:xfrm>
+          <a:prstGeom prst="line">
+            <a:avLst/>
+          </a:prstGeom>
+          <a:ln w="7620">
+            <a:solidFill>
+              <a:srgbClr val="2E4756"/>
+            </a:solidFill>
+          </a:ln>
+          <a:effectLst/>
+        </p:spPr>
+      </p:cxnSp>
+      <p:sp>
+        <p:nvSpPr>
+          <p:cNvPr id="23" name="C1-E05 text 21" descr="sci-ppt:o021"/>
+          <p:cNvSpPr txBox="1"/>
+          <p:nvPr/>
+        </p:nvSpPr>
+        <p:spPr>
+          <a:xfrm>
+            <a:off x="0" y="3648456"/>
+            <a:ext cx="777240" cy="208407"/>
+          </a:xfrm>
+          <a:prstGeom prst="rect">
+            <a:avLst/>
+          </a:prstGeom>
+          <a:noFill/>
+          <a:effectLst/>
+        </p:spPr>
+        <p:txBody>
+          <a:bodyPr wrap="none" lIns="18288" rIns="18288" tIns="18288" bIns="18288" anchor="t">
+            <a:spAutoFit/>
+          </a:bodyPr>
+          <a:lstStyle/>
+          <a:p>
+            <a:pPr algn="r">
+              <a:spcAft>
+                <a:spcPts val="0"/>
+              </a:spcAft>
+            </a:pPr>
+            <a:r>
+              <a:rPr sz="1050" b="0" i="0">
+                <a:solidFill>
+                  <a:srgbClr val="B4C7D2"/>
+                </a:solidFill>
+                <a:latin typeface="Arial"/>
+              </a:rPr>
+              <a:t>1</a:t>
+            </a:r>
+          </a:p>
+        </p:txBody>
+      </p:sp>
+      <p:cxnSp>
+        <p:nvCxnSpPr>
+          <p:cNvPr id="24" name="C1-E05 line 22" descr="sci-ppt:o022"/>
+          <p:cNvCxnSpPr/>
+          <p:nvPr/>
+        </p:nvCxnSpPr>
+        <p:spPr>
+          <a:xfrm>
+            <a:off x="804671" y="2944368"/>
+            <a:ext cx="64009" cy="0"/>
+          </a:xfrm>
+          <a:prstGeom prst="line">
+            <a:avLst/>
+          </a:prstGeom>
+          <a:ln w="12700">
+            <a:solidFill>
+              <a:srgbClr val="B4C7D2"/>
+            </a:solidFill>
+          </a:ln>
+          <a:effectLst/>
+        </p:spPr>
+      </p:cxnSp>
+      <p:cxnSp>
+        <p:nvCxnSpPr>
+          <p:cNvPr id="25" name="C1-E05 line 23" descr="sci-ppt:o023"/>
+          <p:cNvCxnSpPr/>
+          <p:nvPr/>
+        </p:nvCxnSpPr>
+        <p:spPr>
+          <a:xfrm>
+            <a:off x="868680" y="2944368"/>
+            <a:ext cx="5394960" cy="0"/>
+          </a:xfrm>
+          <a:prstGeom prst="line">
+            <a:avLst/>
+          </a:prstGeom>
+          <a:ln w="7620">
+            <a:solidFill>
+              <a:srgbClr val="2E4756"/>
+            </a:solidFill>
+          </a:ln>
+          <a:effectLst/>
+        </p:spPr>
+      </p:cxnSp>
+      <p:sp>
+        <p:nvSpPr>
+          <p:cNvPr id="26" name="C1-E05 text 24" descr="sci-ppt:o024"/>
+          <p:cNvSpPr txBox="1"/>
+          <p:nvPr/>
+        </p:nvSpPr>
+        <p:spPr>
+          <a:xfrm>
+            <a:off x="0" y="2862072"/>
+            <a:ext cx="777240" cy="208407"/>
+          </a:xfrm>
+          <a:prstGeom prst="rect">
+            <a:avLst/>
+          </a:prstGeom>
+          <a:noFill/>
+          <a:effectLst/>
+        </p:spPr>
+        <p:txBody>
+          <a:bodyPr wrap="none" lIns="18288" rIns="18288" tIns="18288" bIns="18288" anchor="t">
+            <a:spAutoFit/>
+          </a:bodyPr>
+          <a:lstStyle/>
+          <a:p>
+            <a:pPr algn="r">
+              <a:spcAft>
+                <a:spcPts val="0"/>
+              </a:spcAft>
+            </a:pPr>
+            <a:r>
+              <a:rPr sz="1050" b="0" i="0">
+                <a:solidFill>
+                  <a:srgbClr val="B4C7D2"/>
+                </a:solidFill>
+                <a:latin typeface="Arial"/>
+              </a:rPr>
+              <a:t>2</a:t>
+            </a:r>
+          </a:p>
+        </p:txBody>
+      </p:sp>
+      <p:cxnSp>
+        <p:nvCxnSpPr>
+          <p:cNvPr id="27" name="C1-E05 line 25" descr="sci-ppt:o025"/>
+          <p:cNvCxnSpPr/>
+          <p:nvPr/>
+        </p:nvCxnSpPr>
+        <p:spPr>
+          <a:xfrm>
+            <a:off x="804671" y="2157984"/>
+            <a:ext cx="64009" cy="0"/>
+          </a:xfrm>
+          <a:prstGeom prst="line">
+            <a:avLst/>
+          </a:prstGeom>
+          <a:ln w="12700">
+            <a:solidFill>
+              <a:srgbClr val="B4C7D2"/>
+            </a:solidFill>
+          </a:ln>
+          <a:effectLst/>
+        </p:spPr>
+      </p:cxnSp>
+      <p:cxnSp>
+        <p:nvCxnSpPr>
+          <p:cNvPr id="28" name="C1-E05 line 26" descr="sci-ppt:o026"/>
+          <p:cNvCxnSpPr/>
+          <p:nvPr/>
+        </p:nvCxnSpPr>
+        <p:spPr>
+          <a:xfrm>
+            <a:off x="868680" y="2157984"/>
+            <a:ext cx="5394960" cy="0"/>
+          </a:xfrm>
+          <a:prstGeom prst="line">
+            <a:avLst/>
+          </a:prstGeom>
+          <a:ln w="7620">
+            <a:solidFill>
+              <a:srgbClr val="2E4756"/>
+            </a:solidFill>
+          </a:ln>
+          <a:effectLst/>
+        </p:spPr>
+      </p:cxnSp>
+      <p:sp>
+        <p:nvSpPr>
+          <p:cNvPr id="29" name="C1-E05 text 27" descr="sci-ppt:o027"/>
+          <p:cNvSpPr txBox="1"/>
+          <p:nvPr/>
+        </p:nvSpPr>
+        <p:spPr>
+          <a:xfrm>
+            <a:off x="0" y="2075688"/>
+            <a:ext cx="777240" cy="208407"/>
+          </a:xfrm>
+          <a:prstGeom prst="rect">
+            <a:avLst/>
+          </a:prstGeom>
+          <a:noFill/>
+          <a:effectLst/>
+        </p:spPr>
+        <p:txBody>
+          <a:bodyPr wrap="none" lIns="18288" rIns="18288" tIns="18288" bIns="18288" anchor="t">
+            <a:spAutoFit/>
+          </a:bodyPr>
+          <a:lstStyle/>
+          <a:p>
+            <a:pPr algn="r">
+              <a:spcAft>
+                <a:spcPts val="0"/>
+              </a:spcAft>
+            </a:pPr>
+            <a:r>
+              <a:rPr sz="1050" b="0" i="0">
+                <a:solidFill>
+                  <a:srgbClr val="B4C7D2"/>
+                </a:solidFill>
+                <a:latin typeface="Arial"/>
+              </a:rPr>
+              <a:t>3</a:t>
+            </a:r>
+          </a:p>
+        </p:txBody>
+      </p:sp>
+      <p:cxnSp>
+        <p:nvCxnSpPr>
+          <p:cNvPr id="30" name="C1-E05 line 28" descr="sci-ppt:o028"/>
+          <p:cNvCxnSpPr/>
+          <p:nvPr/>
+        </p:nvCxnSpPr>
+        <p:spPr>
+          <a:xfrm>
+            <a:off x="804671" y="1371600"/>
+            <a:ext cx="64009" cy="0"/>
+          </a:xfrm>
+          <a:prstGeom prst="line">
+            <a:avLst/>
+          </a:prstGeom>
+          <a:ln w="12700">
+            <a:solidFill>
+              <a:srgbClr val="B4C7D2"/>
+            </a:solidFill>
+          </a:ln>
+          <a:effectLst/>
+        </p:spPr>
+      </p:cxnSp>
+      <p:cxnSp>
+        <p:nvCxnSpPr>
+          <p:cNvPr id="31" name="C1-E05 line 29" descr="sci-ppt:o029"/>
+          <p:cNvCxnSpPr/>
+          <p:nvPr/>
+        </p:nvCxnSpPr>
+        <p:spPr>
+          <a:xfrm>
+            <a:off x="868680" y="1371600"/>
+            <a:ext cx="5394960" cy="0"/>
+          </a:xfrm>
+          <a:prstGeom prst="line">
+            <a:avLst/>
+          </a:prstGeom>
+          <a:ln w="7620">
+            <a:solidFill>
+              <a:srgbClr val="2E4756"/>
+            </a:solidFill>
+          </a:ln>
+          <a:effectLst/>
+        </p:spPr>
+      </p:cxnSp>
+      <p:sp>
+        <p:nvSpPr>
+          <p:cNvPr id="32" name="C1-E05 text 30" descr="sci-ppt:o030"/>
+          <p:cNvSpPr txBox="1"/>
+          <p:nvPr/>
+        </p:nvSpPr>
+        <p:spPr>
+          <a:xfrm>
+            <a:off x="0" y="1289304"/>
+            <a:ext cx="777240" cy="208407"/>
+          </a:xfrm>
+          <a:prstGeom prst="rect">
+            <a:avLst/>
+          </a:prstGeom>
+          <a:noFill/>
+          <a:effectLst/>
+        </p:spPr>
+        <p:txBody>
+          <a:bodyPr wrap="none" lIns="18288" rIns="18288" tIns="18288" bIns="18288" anchor="t">
+            <a:spAutoFit/>
+          </a:bodyPr>
+          <a:lstStyle/>
+          <a:p>
+            <a:pPr algn="r">
+              <a:spcAft>
+                <a:spcPts val="0"/>
+              </a:spcAft>
+            </a:pPr>
+            <a:r>
+              <a:rPr sz="1050" b="0" i="0">
+                <a:solidFill>
+                  <a:srgbClr val="B4C7D2"/>
+                </a:solidFill>
+                <a:latin typeface="Arial"/>
+              </a:rPr>
+              <a:t>4</a:t>
+            </a:r>
+          </a:p>
+        </p:txBody>
+      </p:sp>
+      <p:sp>
+        <p:nvSpPr>
+          <p:cNvPr id="33" name="C1-E05 text 31" descr="sci-ppt:o031"/>
+          <p:cNvSpPr txBox="1"/>
+          <p:nvPr/>
+        </p:nvSpPr>
+        <p:spPr>
+          <a:xfrm>
+            <a:off x="868680" y="5586983"/>
+            <a:ext cx="5394960" cy="231648"/>
+          </a:xfrm>
+          <a:prstGeom prst="rect">
+            <a:avLst/>
+          </a:prstGeom>
+          <a:noFill/>
+          <a:effectLst/>
+        </p:spPr>
+        <p:txBody>
+          <a:bodyPr wrap="none" lIns="18288" rIns="18288" tIns="18288" bIns="18288" anchor="t">
+            <a:spAutoFit/>
+          </a:bodyPr>
+          <a:lstStyle/>
+          <a:p>
+            <a:pPr algn="ctr">
+              <a:spcAft>
+                <a:spcPts val="0"/>
+              </a:spcAft>
+            </a:pPr>
+            <a:r>
+              <a:rPr sz="1200" b="0" i="0">
+                <a:solidFill>
+                  <a:srgbClr val="E7F0F3"/>
+                </a:solidFill>
+                <a:latin typeface="Arial"/>
+              </a:rPr>
+              <a:t>r / R</a:t>
+            </a:r>
+          </a:p>
+        </p:txBody>
+      </p:sp>
+      <p:sp>
+        <p:nvSpPr>
+          <p:cNvPr id="34" name="C1-E05 text 32" descr="sci-ppt:o032"/>
+          <p:cNvSpPr txBox="1"/>
+          <p:nvPr/>
+        </p:nvSpPr>
+        <p:spPr>
+          <a:xfrm>
+            <a:off x="320040" y="1024128"/>
+            <a:ext cx="5394960" cy="231648"/>
+          </a:xfrm>
+          <a:prstGeom prst="rect">
+            <a:avLst/>
+          </a:prstGeom>
+          <a:noFill/>
+          <a:effectLst/>
+        </p:spPr>
+        <p:txBody>
+          <a:bodyPr wrap="none" lIns="18288" rIns="18288" tIns="18288" bIns="18288" anchor="t">
+            <a:spAutoFit/>
+          </a:bodyPr>
+          <a:lstStyle/>
+          <a:p>
+            <a:pPr algn="l">
+              <a:spcAft>
+                <a:spcPts val="0"/>
+              </a:spcAft>
+            </a:pPr>
+            <a:r>
+              <a:rPr sz="1200" b="0" i="0">
+                <a:solidFill>
+                  <a:srgbClr val="E7F0F3"/>
+                </a:solidFill>
+                <a:latin typeface="Arial"/>
+              </a:rPr>
+              <a:t>(p − p∞) / ρ</a:t>
+            </a:r>
+          </a:p>
+        </p:txBody>
+      </p:sp>
+      <p:cxnSp>
+        <p:nvCxnSpPr>
+          <p:cNvPr id="35" name="C1-E05 line 33" descr="sci-ppt:o033"/>
+          <p:cNvCxnSpPr/>
+          <p:nvPr/>
+        </p:nvCxnSpPr>
+        <p:spPr>
+          <a:xfrm>
+            <a:off x="868680" y="4517136"/>
+            <a:ext cx="5394960" cy="0"/>
+          </a:xfrm>
+          <a:prstGeom prst="line">
+            <a:avLst/>
+          </a:prstGeom>
+          <a:ln w="15240">
+            <a:solidFill>
+              <a:srgbClr val="2E4756"/>
+            </a:solidFill>
+          </a:ln>
+          <a:effectLst/>
+        </p:spPr>
+      </p:cxnSp>
+      <p:sp>
+        <p:nvSpPr>
+          <p:cNvPr id="36" name="C1-E05 polygon 34" descr="sci-ppt:o034"/>
           <p:cNvSpPr/>
           <p:nvPr/>
         </p:nvSpPr>
         <p:spPr>
           <a:xfrm>
-            <a:off x="2072640" y="1402080"/>
-            <a:ext cx="2438400" cy="2438400"/>
+            <a:off x="868680" y="3713349"/>
+            <a:ext cx="5394960" cy="510428"/>
+          </a:xfrm>
+          <a:custGeom>
+            <a:avLst/>
+            <a:gdLst/>
+            <a:ahLst/>
+            <a:cxnLst/>
+            <a:rect l="l" t="t" r="r" b="b"/>
+            <a:pathLst>
+              <a:path w="5394960" h="510428">
+                <a:moveTo>
+                  <a:pt x="0" y="17403"/>
+                </a:moveTo>
+                <a:lnTo>
+                  <a:pt x="36207" y="10549"/>
+                </a:lnTo>
+                <a:lnTo>
+                  <a:pt x="72415" y="5627"/>
+                </a:lnTo>
+                <a:lnTo>
+                  <a:pt x="108623" y="2374"/>
+                </a:lnTo>
+                <a:lnTo>
+                  <a:pt x="144831" y="563"/>
+                </a:lnTo>
+                <a:lnTo>
+                  <a:pt x="181038" y="0"/>
+                </a:lnTo>
+                <a:lnTo>
+                  <a:pt x="217246" y="514"/>
+                </a:lnTo>
+                <a:lnTo>
+                  <a:pt x="253454" y="1958"/>
+                </a:lnTo>
+                <a:lnTo>
+                  <a:pt x="289662" y="4205"/>
+                </a:lnTo>
+                <a:lnTo>
+                  <a:pt x="325870" y="7144"/>
+                </a:lnTo>
+                <a:lnTo>
+                  <a:pt x="362077" y="10677"/>
+                </a:lnTo>
+                <a:lnTo>
+                  <a:pt x="398285" y="14720"/>
+                </a:lnTo>
+                <a:lnTo>
+                  <a:pt x="434493" y="19198"/>
+                </a:lnTo>
+                <a:lnTo>
+                  <a:pt x="470701" y="24048"/>
+                </a:lnTo>
+                <a:lnTo>
+                  <a:pt x="506908" y="29212"/>
+                </a:lnTo>
+                <a:lnTo>
+                  <a:pt x="543116" y="34641"/>
+                </a:lnTo>
+                <a:lnTo>
+                  <a:pt x="579324" y="40292"/>
+                </a:lnTo>
+                <a:lnTo>
+                  <a:pt x="615532" y="46126"/>
+                </a:lnTo>
+                <a:lnTo>
+                  <a:pt x="651740" y="52110"/>
+                </a:lnTo>
+                <a:lnTo>
+                  <a:pt x="687947" y="58215"/>
+                </a:lnTo>
+                <a:lnTo>
+                  <a:pt x="724155" y="64415"/>
+                </a:lnTo>
+                <a:lnTo>
+                  <a:pt x="760363" y="70686"/>
+                </a:lnTo>
+                <a:lnTo>
+                  <a:pt x="796571" y="77011"/>
+                </a:lnTo>
+                <a:lnTo>
+                  <a:pt x="832779" y="83370"/>
+                </a:lnTo>
+                <a:lnTo>
+                  <a:pt x="868986" y="89749"/>
+                </a:lnTo>
+                <a:lnTo>
+                  <a:pt x="905194" y="96134"/>
+                </a:lnTo>
+                <a:lnTo>
+                  <a:pt x="941402" y="102514"/>
+                </a:lnTo>
+                <a:lnTo>
+                  <a:pt x="977610" y="108879"/>
+                </a:lnTo>
+                <a:lnTo>
+                  <a:pt x="1013817" y="115220"/>
+                </a:lnTo>
+                <a:lnTo>
+                  <a:pt x="1050025" y="121529"/>
+                </a:lnTo>
+                <a:lnTo>
+                  <a:pt x="1086233" y="127798"/>
+                </a:lnTo>
+                <a:lnTo>
+                  <a:pt x="1122441" y="134024"/>
+                </a:lnTo>
+                <a:lnTo>
+                  <a:pt x="1158649" y="140200"/>
+                </a:lnTo>
+                <a:lnTo>
+                  <a:pt x="1194856" y="146322"/>
+                </a:lnTo>
+                <a:lnTo>
+                  <a:pt x="1231064" y="152387"/>
+                </a:lnTo>
+                <a:lnTo>
+                  <a:pt x="1267272" y="158391"/>
+                </a:lnTo>
+                <a:lnTo>
+                  <a:pt x="1303480" y="164332"/>
+                </a:lnTo>
+                <a:lnTo>
+                  <a:pt x="1339688" y="170208"/>
+                </a:lnTo>
+                <a:lnTo>
+                  <a:pt x="1375895" y="176016"/>
+                </a:lnTo>
+                <a:lnTo>
+                  <a:pt x="1412103" y="181757"/>
+                </a:lnTo>
+                <a:lnTo>
+                  <a:pt x="1448311" y="187427"/>
+                </a:lnTo>
+                <a:lnTo>
+                  <a:pt x="1484519" y="193027"/>
+                </a:lnTo>
+                <a:lnTo>
+                  <a:pt x="1520726" y="198557"/>
+                </a:lnTo>
+                <a:lnTo>
+                  <a:pt x="1556934" y="204014"/>
+                </a:lnTo>
+                <a:lnTo>
+                  <a:pt x="1593142" y="209400"/>
+                </a:lnTo>
+                <a:lnTo>
+                  <a:pt x="1629350" y="214715"/>
+                </a:lnTo>
+                <a:lnTo>
+                  <a:pt x="1665558" y="219958"/>
+                </a:lnTo>
+                <a:lnTo>
+                  <a:pt x="1701765" y="225129"/>
+                </a:lnTo>
+                <a:lnTo>
+                  <a:pt x="1737973" y="230229"/>
+                </a:lnTo>
+                <a:lnTo>
+                  <a:pt x="1774181" y="235259"/>
+                </a:lnTo>
+                <a:lnTo>
+                  <a:pt x="1810389" y="240218"/>
+                </a:lnTo>
+                <a:lnTo>
+                  <a:pt x="1846597" y="245108"/>
+                </a:lnTo>
+                <a:lnTo>
+                  <a:pt x="1882804" y="249930"/>
+                </a:lnTo>
+                <a:lnTo>
+                  <a:pt x="1919012" y="254683"/>
+                </a:lnTo>
+                <a:lnTo>
+                  <a:pt x="1955220" y="259368"/>
+                </a:lnTo>
+                <a:lnTo>
+                  <a:pt x="1991428" y="263987"/>
+                </a:lnTo>
+                <a:lnTo>
+                  <a:pt x="2027635" y="268540"/>
+                </a:lnTo>
+                <a:lnTo>
+                  <a:pt x="2063843" y="273028"/>
+                </a:lnTo>
+                <a:lnTo>
+                  <a:pt x="2100051" y="277453"/>
+                </a:lnTo>
+                <a:lnTo>
+                  <a:pt x="2136259" y="281814"/>
+                </a:lnTo>
+                <a:lnTo>
+                  <a:pt x="2172467" y="286112"/>
+                </a:lnTo>
+                <a:lnTo>
+                  <a:pt x="2208674" y="290350"/>
+                </a:lnTo>
+                <a:lnTo>
+                  <a:pt x="2244882" y="294527"/>
+                </a:lnTo>
+                <a:lnTo>
+                  <a:pt x="2281090" y="298644"/>
+                </a:lnTo>
+                <a:lnTo>
+                  <a:pt x="2317298" y="302703"/>
+                </a:lnTo>
+                <a:lnTo>
+                  <a:pt x="2353506" y="306705"/>
+                </a:lnTo>
+                <a:lnTo>
+                  <a:pt x="2389713" y="310650"/>
+                </a:lnTo>
+                <a:lnTo>
+                  <a:pt x="2425921" y="314539"/>
+                </a:lnTo>
+                <a:lnTo>
+                  <a:pt x="2462129" y="318373"/>
+                </a:lnTo>
+                <a:lnTo>
+                  <a:pt x="2498337" y="322153"/>
+                </a:lnTo>
+                <a:lnTo>
+                  <a:pt x="2534544" y="325881"/>
+                </a:lnTo>
+                <a:lnTo>
+                  <a:pt x="2570752" y="329556"/>
+                </a:lnTo>
+                <a:lnTo>
+                  <a:pt x="2606960" y="333180"/>
+                </a:lnTo>
+                <a:lnTo>
+                  <a:pt x="2643168" y="336754"/>
+                </a:lnTo>
+                <a:lnTo>
+                  <a:pt x="2679376" y="340278"/>
+                </a:lnTo>
+                <a:lnTo>
+                  <a:pt x="2715583" y="343754"/>
+                </a:lnTo>
+                <a:lnTo>
+                  <a:pt x="2751791" y="347182"/>
+                </a:lnTo>
+                <a:lnTo>
+                  <a:pt x="2787999" y="350563"/>
+                </a:lnTo>
+                <a:lnTo>
+                  <a:pt x="2824207" y="353898"/>
+                </a:lnTo>
+                <a:lnTo>
+                  <a:pt x="2860415" y="357188"/>
+                </a:lnTo>
+                <a:lnTo>
+                  <a:pt x="2896622" y="360433"/>
+                </a:lnTo>
+                <a:lnTo>
+                  <a:pt x="2932830" y="363635"/>
+                </a:lnTo>
+                <a:lnTo>
+                  <a:pt x="2969038" y="366793"/>
+                </a:lnTo>
+                <a:lnTo>
+                  <a:pt x="3005246" y="369910"/>
+                </a:lnTo>
+                <a:lnTo>
+                  <a:pt x="3041453" y="372985"/>
+                </a:lnTo>
+                <a:lnTo>
+                  <a:pt x="3077661" y="376020"/>
+                </a:lnTo>
+                <a:lnTo>
+                  <a:pt x="3113869" y="379014"/>
+                </a:lnTo>
+                <a:lnTo>
+                  <a:pt x="3150077" y="381970"/>
+                </a:lnTo>
+                <a:lnTo>
+                  <a:pt x="3186285" y="384886"/>
+                </a:lnTo>
+                <a:lnTo>
+                  <a:pt x="3222492" y="387765"/>
+                </a:lnTo>
+                <a:lnTo>
+                  <a:pt x="3258700" y="390607"/>
+                </a:lnTo>
+                <a:lnTo>
+                  <a:pt x="3294908" y="393412"/>
+                </a:lnTo>
+                <a:lnTo>
+                  <a:pt x="3331116" y="396181"/>
+                </a:lnTo>
+                <a:lnTo>
+                  <a:pt x="3367324" y="398915"/>
+                </a:lnTo>
+                <a:lnTo>
+                  <a:pt x="3403531" y="401614"/>
+                </a:lnTo>
+                <a:lnTo>
+                  <a:pt x="3439739" y="404279"/>
+                </a:lnTo>
+                <a:lnTo>
+                  <a:pt x="3475947" y="406911"/>
+                </a:lnTo>
+                <a:lnTo>
+                  <a:pt x="3512155" y="409510"/>
+                </a:lnTo>
+                <a:lnTo>
+                  <a:pt x="3548362" y="412076"/>
+                </a:lnTo>
+                <a:lnTo>
+                  <a:pt x="3584570" y="414611"/>
+                </a:lnTo>
+                <a:lnTo>
+                  <a:pt x="3620778" y="417114"/>
+                </a:lnTo>
+                <a:lnTo>
+                  <a:pt x="3656986" y="419587"/>
+                </a:lnTo>
+                <a:lnTo>
+                  <a:pt x="3693194" y="422029"/>
+                </a:lnTo>
+                <a:lnTo>
+                  <a:pt x="3729401" y="424442"/>
+                </a:lnTo>
+                <a:lnTo>
+                  <a:pt x="3765609" y="426826"/>
+                </a:lnTo>
+                <a:lnTo>
+                  <a:pt x="3801817" y="429181"/>
+                </a:lnTo>
+                <a:lnTo>
+                  <a:pt x="3838025" y="431508"/>
+                </a:lnTo>
+                <a:lnTo>
+                  <a:pt x="3874233" y="433807"/>
+                </a:lnTo>
+                <a:lnTo>
+                  <a:pt x="3910440" y="436079"/>
+                </a:lnTo>
+                <a:lnTo>
+                  <a:pt x="3946648" y="438325"/>
+                </a:lnTo>
+                <a:lnTo>
+                  <a:pt x="3982856" y="440543"/>
+                </a:lnTo>
+                <a:lnTo>
+                  <a:pt x="4019064" y="442736"/>
+                </a:lnTo>
+                <a:lnTo>
+                  <a:pt x="4055271" y="444904"/>
+                </a:lnTo>
+                <a:lnTo>
+                  <a:pt x="4091479" y="447046"/>
+                </a:lnTo>
+                <a:lnTo>
+                  <a:pt x="4127687" y="449164"/>
+                </a:lnTo>
+                <a:lnTo>
+                  <a:pt x="4163895" y="451258"/>
+                </a:lnTo>
+                <a:lnTo>
+                  <a:pt x="4200103" y="453327"/>
+                </a:lnTo>
+                <a:lnTo>
+                  <a:pt x="4236310" y="455374"/>
+                </a:lnTo>
+                <a:lnTo>
+                  <a:pt x="4272518" y="457397"/>
+                </a:lnTo>
+                <a:lnTo>
+                  <a:pt x="4308726" y="459397"/>
+                </a:lnTo>
+                <a:lnTo>
+                  <a:pt x="4344934" y="461375"/>
+                </a:lnTo>
+                <a:lnTo>
+                  <a:pt x="4381142" y="463332"/>
+                </a:lnTo>
+                <a:lnTo>
+                  <a:pt x="4417349" y="465266"/>
+                </a:lnTo>
+                <a:lnTo>
+                  <a:pt x="4453557" y="467179"/>
+                </a:lnTo>
+                <a:lnTo>
+                  <a:pt x="4489765" y="469072"/>
+                </a:lnTo>
+                <a:lnTo>
+                  <a:pt x="4525973" y="470943"/>
+                </a:lnTo>
+                <a:lnTo>
+                  <a:pt x="4562180" y="472795"/>
+                </a:lnTo>
+                <a:lnTo>
+                  <a:pt x="4598388" y="474626"/>
+                </a:lnTo>
+                <a:lnTo>
+                  <a:pt x="4634596" y="476438"/>
+                </a:lnTo>
+                <a:lnTo>
+                  <a:pt x="4670804" y="478230"/>
+                </a:lnTo>
+                <a:lnTo>
+                  <a:pt x="4707012" y="480003"/>
+                </a:lnTo>
+                <a:lnTo>
+                  <a:pt x="4743219" y="481758"/>
+                </a:lnTo>
+                <a:lnTo>
+                  <a:pt x="4779427" y="483494"/>
+                </a:lnTo>
+                <a:lnTo>
+                  <a:pt x="4815635" y="485211"/>
+                </a:lnTo>
+                <a:lnTo>
+                  <a:pt x="4851843" y="486911"/>
+                </a:lnTo>
+                <a:lnTo>
+                  <a:pt x="4888051" y="488593"/>
+                </a:lnTo>
+                <a:lnTo>
+                  <a:pt x="4924258" y="490258"/>
+                </a:lnTo>
+                <a:lnTo>
+                  <a:pt x="4960466" y="491906"/>
+                </a:lnTo>
+                <a:lnTo>
+                  <a:pt x="4996674" y="493536"/>
+                </a:lnTo>
+                <a:lnTo>
+                  <a:pt x="5032882" y="495150"/>
+                </a:lnTo>
+                <a:lnTo>
+                  <a:pt x="5069089" y="496748"/>
+                </a:lnTo>
+                <a:lnTo>
+                  <a:pt x="5105297" y="498330"/>
+                </a:lnTo>
+                <a:lnTo>
+                  <a:pt x="5141505" y="499895"/>
+                </a:lnTo>
+                <a:lnTo>
+                  <a:pt x="5177713" y="501445"/>
+                </a:lnTo>
+                <a:lnTo>
+                  <a:pt x="5213921" y="502980"/>
+                </a:lnTo>
+                <a:lnTo>
+                  <a:pt x="5250128" y="504499"/>
+                </a:lnTo>
+                <a:lnTo>
+                  <a:pt x="5286336" y="506003"/>
+                </a:lnTo>
+                <a:lnTo>
+                  <a:pt x="5322544" y="507493"/>
+                </a:lnTo>
+                <a:lnTo>
+                  <a:pt x="5358752" y="508968"/>
+                </a:lnTo>
+                <a:lnTo>
+                  <a:pt x="5394960" y="510428"/>
+                </a:lnTo>
+              </a:path>
+            </a:pathLst>
+          </a:custGeom>
+          <a:noFill/>
+          <a:ln w="35560">
+            <a:solidFill>
+              <a:srgbClr val="8EDBD4"/>
+            </a:solidFill>
+          </a:ln>
+          <a:effectLst/>
+        </p:spPr>
+        <p:txBody>
+          <a:bodyPr rtlCol="0" anchor="ctr"/>
+          <a:lstStyle/>
+          <a:p>
+            <a:pPr algn="ctr"/>
+          </a:p>
+        </p:txBody>
+      </p:sp>
+      <p:sp>
+        <p:nvSpPr>
+          <p:cNvPr id="37" name="C1-E05 polygon 35" descr="sci-ppt:o035"/>
+          <p:cNvSpPr/>
+          <p:nvPr/>
+        </p:nvSpPr>
+        <p:spPr>
+          <a:xfrm>
+            <a:off x="868680" y="1764791"/>
+            <a:ext cx="5394960" cy="1967496"/>
+          </a:xfrm>
+          <a:custGeom>
+            <a:avLst/>
+            <a:gdLst/>
+            <a:ahLst/>
+            <a:cxnLst/>
+            <a:rect l="l" t="t" r="r" b="b"/>
+            <a:pathLst>
+              <a:path w="5394960" h="1967496">
+                <a:moveTo>
+                  <a:pt x="0" y="0"/>
+                </a:moveTo>
+                <a:lnTo>
+                  <a:pt x="36207" y="31949"/>
+                </a:lnTo>
+                <a:lnTo>
+                  <a:pt x="72415" y="64327"/>
+                </a:lnTo>
+                <a:lnTo>
+                  <a:pt x="108623" y="96957"/>
+                </a:lnTo>
+                <a:lnTo>
+                  <a:pt x="144831" y="129692"/>
+                </a:lnTo>
+                <a:lnTo>
+                  <a:pt x="181038" y="162411"/>
+                </a:lnTo>
+                <a:lnTo>
+                  <a:pt x="217246" y="195011"/>
+                </a:lnTo>
+                <a:lnTo>
+                  <a:pt x="253454" y="227410"/>
+                </a:lnTo>
+                <a:lnTo>
+                  <a:pt x="289662" y="259538"/>
+                </a:lnTo>
+                <a:lnTo>
+                  <a:pt x="325870" y="291338"/>
+                </a:lnTo>
+                <a:lnTo>
+                  <a:pt x="362077" y="322765"/>
+                </a:lnTo>
+                <a:lnTo>
+                  <a:pt x="398285" y="353783"/>
+                </a:lnTo>
+                <a:lnTo>
+                  <a:pt x="434493" y="384361"/>
+                </a:lnTo>
+                <a:lnTo>
+                  <a:pt x="470701" y="414478"/>
+                </a:lnTo>
+                <a:lnTo>
+                  <a:pt x="506908" y="444115"/>
+                </a:lnTo>
+                <a:lnTo>
+                  <a:pt x="543116" y="473261"/>
+                </a:lnTo>
+                <a:lnTo>
+                  <a:pt x="579324" y="501906"/>
+                </a:lnTo>
+                <a:lnTo>
+                  <a:pt x="615532" y="530044"/>
+                </a:lnTo>
+                <a:lnTo>
+                  <a:pt x="651740" y="557673"/>
+                </a:lnTo>
+                <a:lnTo>
+                  <a:pt x="687947" y="584792"/>
+                </a:lnTo>
+                <a:lnTo>
+                  <a:pt x="724155" y="611403"/>
+                </a:lnTo>
+                <a:lnTo>
+                  <a:pt x="760363" y="637508"/>
+                </a:lnTo>
+                <a:lnTo>
+                  <a:pt x="796571" y="663113"/>
+                </a:lnTo>
+                <a:lnTo>
+                  <a:pt x="832779" y="688221"/>
+                </a:lnTo>
+                <a:lnTo>
+                  <a:pt x="868986" y="712841"/>
+                </a:lnTo>
+                <a:lnTo>
+                  <a:pt x="905194" y="736978"/>
+                </a:lnTo>
+                <a:lnTo>
+                  <a:pt x="941402" y="760641"/>
+                </a:lnTo>
+                <a:lnTo>
+                  <a:pt x="977610" y="783837"/>
+                </a:lnTo>
+                <a:lnTo>
+                  <a:pt x="1013817" y="806576"/>
+                </a:lnTo>
+                <a:lnTo>
+                  <a:pt x="1050025" y="828866"/>
+                </a:lnTo>
+                <a:lnTo>
+                  <a:pt x="1086233" y="850716"/>
+                </a:lnTo>
+                <a:lnTo>
+                  <a:pt x="1122441" y="872135"/>
+                </a:lnTo>
+                <a:lnTo>
+                  <a:pt x="1158649" y="893133"/>
+                </a:lnTo>
+                <a:lnTo>
+                  <a:pt x="1194856" y="913718"/>
+                </a:lnTo>
+                <a:lnTo>
+                  <a:pt x="1231064" y="933901"/>
+                </a:lnTo>
+                <a:lnTo>
+                  <a:pt x="1267272" y="953689"/>
+                </a:lnTo>
+                <a:lnTo>
+                  <a:pt x="1303480" y="973092"/>
+                </a:lnTo>
+                <a:lnTo>
+                  <a:pt x="1339688" y="992119"/>
+                </a:lnTo>
+                <a:lnTo>
+                  <a:pt x="1375895" y="1010779"/>
+                </a:lnTo>
+                <a:lnTo>
+                  <a:pt x="1412103" y="1029081"/>
+                </a:lnTo>
+                <a:lnTo>
+                  <a:pt x="1448311" y="1047033"/>
+                </a:lnTo>
+                <a:lnTo>
+                  <a:pt x="1484519" y="1064644"/>
+                </a:lnTo>
+                <a:lnTo>
+                  <a:pt x="1520726" y="1081922"/>
+                </a:lnTo>
+                <a:lnTo>
+                  <a:pt x="1556934" y="1098874"/>
+                </a:lnTo>
+                <a:lnTo>
+                  <a:pt x="1593142" y="1115510"/>
+                </a:lnTo>
+                <a:lnTo>
+                  <a:pt x="1629350" y="1131836"/>
+                </a:lnTo>
+                <a:lnTo>
+                  <a:pt x="1665558" y="1147860"/>
+                </a:lnTo>
+                <a:lnTo>
+                  <a:pt x="1701765" y="1163590"/>
+                </a:lnTo>
+                <a:lnTo>
+                  <a:pt x="1737973" y="1179033"/>
+                </a:lnTo>
+                <a:lnTo>
+                  <a:pt x="1774181" y="1194195"/>
+                </a:lnTo>
+                <a:lnTo>
+                  <a:pt x="1810389" y="1209084"/>
+                </a:lnTo>
+                <a:lnTo>
+                  <a:pt x="1846597" y="1223706"/>
+                </a:lnTo>
+                <a:lnTo>
+                  <a:pt x="1882804" y="1238068"/>
+                </a:lnTo>
+                <a:lnTo>
+                  <a:pt x="1919012" y="1252175"/>
+                </a:lnTo>
+                <a:lnTo>
+                  <a:pt x="1955220" y="1266035"/>
+                </a:lnTo>
+                <a:lnTo>
+                  <a:pt x="1991428" y="1279653"/>
+                </a:lnTo>
+                <a:lnTo>
+                  <a:pt x="2027635" y="1293035"/>
+                </a:lnTo>
+                <a:lnTo>
+                  <a:pt x="2063843" y="1306186"/>
+                </a:lnTo>
+                <a:lnTo>
+                  <a:pt x="2100051" y="1319113"/>
+                </a:lnTo>
+                <a:lnTo>
+                  <a:pt x="2136259" y="1331819"/>
+                </a:lnTo>
+                <a:lnTo>
+                  <a:pt x="2172467" y="1344312"/>
+                </a:lnTo>
+                <a:lnTo>
+                  <a:pt x="2208674" y="1356594"/>
+                </a:lnTo>
+                <a:lnTo>
+                  <a:pt x="2244882" y="1368673"/>
+                </a:lnTo>
+                <a:lnTo>
+                  <a:pt x="2281090" y="1380551"/>
+                </a:lnTo>
+                <a:lnTo>
+                  <a:pt x="2317298" y="1392235"/>
+                </a:lnTo>
+                <a:lnTo>
+                  <a:pt x="2353506" y="1403728"/>
+                </a:lnTo>
+                <a:lnTo>
+                  <a:pt x="2389713" y="1415035"/>
+                </a:lnTo>
+                <a:lnTo>
+                  <a:pt x="2425921" y="1426159"/>
+                </a:lnTo>
+                <a:lnTo>
+                  <a:pt x="2462129" y="1437106"/>
+                </a:lnTo>
+                <a:lnTo>
+                  <a:pt x="2498337" y="1447880"/>
+                </a:lnTo>
+                <a:lnTo>
+                  <a:pt x="2534544" y="1458483"/>
+                </a:lnTo>
+                <a:lnTo>
+                  <a:pt x="2570752" y="1468920"/>
+                </a:lnTo>
+                <a:lnTo>
+                  <a:pt x="2606960" y="1479195"/>
+                </a:lnTo>
+                <a:lnTo>
+                  <a:pt x="2643168" y="1489311"/>
+                </a:lnTo>
+                <a:lnTo>
+                  <a:pt x="2679376" y="1499272"/>
+                </a:lnTo>
+                <a:lnTo>
+                  <a:pt x="2715583" y="1509082"/>
+                </a:lnTo>
+                <a:lnTo>
+                  <a:pt x="2751791" y="1518742"/>
+                </a:lnTo>
+                <a:lnTo>
+                  <a:pt x="2787999" y="1528258"/>
+                </a:lnTo>
+                <a:lnTo>
+                  <a:pt x="2824207" y="1537631"/>
+                </a:lnTo>
+                <a:lnTo>
+                  <a:pt x="2860415" y="1546865"/>
+                </a:lnTo>
+                <a:lnTo>
+                  <a:pt x="2896622" y="1555963"/>
+                </a:lnTo>
+                <a:lnTo>
+                  <a:pt x="2932830" y="1564927"/>
+                </a:lnTo>
+                <a:lnTo>
+                  <a:pt x="2969038" y="1573761"/>
+                </a:lnTo>
+                <a:lnTo>
+                  <a:pt x="3005246" y="1582468"/>
+                </a:lnTo>
+                <a:lnTo>
+                  <a:pt x="3041453" y="1591049"/>
+                </a:lnTo>
+                <a:lnTo>
+                  <a:pt x="3077661" y="1599508"/>
+                </a:lnTo>
+                <a:lnTo>
+                  <a:pt x="3113869" y="1607847"/>
+                </a:lnTo>
+                <a:lnTo>
+                  <a:pt x="3150077" y="1616069"/>
+                </a:lnTo>
+                <a:lnTo>
+                  <a:pt x="3186285" y="1624175"/>
+                </a:lnTo>
+                <a:lnTo>
+                  <a:pt x="3222492" y="1632169"/>
+                </a:lnTo>
+                <a:lnTo>
+                  <a:pt x="3258700" y="1640053"/>
+                </a:lnTo>
+                <a:lnTo>
+                  <a:pt x="3294908" y="1647828"/>
+                </a:lnTo>
+                <a:lnTo>
+                  <a:pt x="3331116" y="1655497"/>
+                </a:lnTo>
+                <a:lnTo>
+                  <a:pt x="3367324" y="1663062"/>
+                </a:lnTo>
+                <a:lnTo>
+                  <a:pt x="3403531" y="1670525"/>
+                </a:lnTo>
+                <a:lnTo>
+                  <a:pt x="3439739" y="1677888"/>
+                </a:lnTo>
+                <a:lnTo>
+                  <a:pt x="3475947" y="1685153"/>
+                </a:lnTo>
+                <a:lnTo>
+                  <a:pt x="3512155" y="1692322"/>
+                </a:lnTo>
+                <a:lnTo>
+                  <a:pt x="3548362" y="1699397"/>
+                </a:lnTo>
+                <a:lnTo>
+                  <a:pt x="3584570" y="1706379"/>
+                </a:lnTo>
+                <a:lnTo>
+                  <a:pt x="3620778" y="1713271"/>
+                </a:lnTo>
+                <a:lnTo>
+                  <a:pt x="3656986" y="1720074"/>
+                </a:lnTo>
+                <a:lnTo>
+                  <a:pt x="3693194" y="1726790"/>
+                </a:lnTo>
+                <a:lnTo>
+                  <a:pt x="3729401" y="1733420"/>
+                </a:lnTo>
+                <a:lnTo>
+                  <a:pt x="3765609" y="1739965"/>
+                </a:lnTo>
+                <a:lnTo>
+                  <a:pt x="3801817" y="1746429"/>
+                </a:lnTo>
+                <a:lnTo>
+                  <a:pt x="3838025" y="1752811"/>
+                </a:lnTo>
+                <a:lnTo>
+                  <a:pt x="3874233" y="1759114"/>
+                </a:lnTo>
+                <a:lnTo>
+                  <a:pt x="3910440" y="1765339"/>
+                </a:lnTo>
+                <a:lnTo>
+                  <a:pt x="3946648" y="1771487"/>
+                </a:lnTo>
+                <a:lnTo>
+                  <a:pt x="3982856" y="1777561"/>
+                </a:lnTo>
+                <a:lnTo>
+                  <a:pt x="4019064" y="1783560"/>
+                </a:lnTo>
+                <a:lnTo>
+                  <a:pt x="4055271" y="1789486"/>
+                </a:lnTo>
+                <a:lnTo>
+                  <a:pt x="4091479" y="1795342"/>
+                </a:lnTo>
+                <a:lnTo>
+                  <a:pt x="4127687" y="1801127"/>
+                </a:lnTo>
+                <a:lnTo>
+                  <a:pt x="4163895" y="1806844"/>
+                </a:lnTo>
+                <a:lnTo>
+                  <a:pt x="4200103" y="1812493"/>
+                </a:lnTo>
+                <a:lnTo>
+                  <a:pt x="4236310" y="1818076"/>
+                </a:lnTo>
+                <a:lnTo>
+                  <a:pt x="4272518" y="1823593"/>
+                </a:lnTo>
+                <a:lnTo>
+                  <a:pt x="4308726" y="1829046"/>
+                </a:lnTo>
+                <a:lnTo>
+                  <a:pt x="4344934" y="1834436"/>
+                </a:lnTo>
+                <a:lnTo>
+                  <a:pt x="4381142" y="1839765"/>
+                </a:lnTo>
+                <a:lnTo>
+                  <a:pt x="4417349" y="1845032"/>
+                </a:lnTo>
+                <a:lnTo>
+                  <a:pt x="4453557" y="1850239"/>
+                </a:lnTo>
+                <a:lnTo>
+                  <a:pt x="4489765" y="1855388"/>
+                </a:lnTo>
+                <a:lnTo>
+                  <a:pt x="4525973" y="1860478"/>
+                </a:lnTo>
+                <a:lnTo>
+                  <a:pt x="4562180" y="1865512"/>
+                </a:lnTo>
+                <a:lnTo>
+                  <a:pt x="4598388" y="1870490"/>
+                </a:lnTo>
+                <a:lnTo>
+                  <a:pt x="4634596" y="1875412"/>
+                </a:lnTo>
+                <a:lnTo>
+                  <a:pt x="4670804" y="1880280"/>
+                </a:lnTo>
+                <a:lnTo>
+                  <a:pt x="4707012" y="1885095"/>
+                </a:lnTo>
+                <a:lnTo>
+                  <a:pt x="4743219" y="1889858"/>
+                </a:lnTo>
+                <a:lnTo>
+                  <a:pt x="4779427" y="1894569"/>
+                </a:lnTo>
+                <a:lnTo>
+                  <a:pt x="4815635" y="1899229"/>
+                </a:lnTo>
+                <a:lnTo>
+                  <a:pt x="4851843" y="1903839"/>
+                </a:lnTo>
+                <a:lnTo>
+                  <a:pt x="4888051" y="1908400"/>
+                </a:lnTo>
+                <a:lnTo>
+                  <a:pt x="4924258" y="1912913"/>
+                </a:lnTo>
+                <a:lnTo>
+                  <a:pt x="4960466" y="1917378"/>
+                </a:lnTo>
+                <a:lnTo>
+                  <a:pt x="4996674" y="1921796"/>
+                </a:lnTo>
+                <a:lnTo>
+                  <a:pt x="5032882" y="1926168"/>
+                </a:lnTo>
+                <a:lnTo>
+                  <a:pt x="5069089" y="1930494"/>
+                </a:lnTo>
+                <a:lnTo>
+                  <a:pt x="5105297" y="1934776"/>
+                </a:lnTo>
+                <a:lnTo>
+                  <a:pt x="5141505" y="1939013"/>
+                </a:lnTo>
+                <a:lnTo>
+                  <a:pt x="5177713" y="1943207"/>
+                </a:lnTo>
+                <a:lnTo>
+                  <a:pt x="5213921" y="1947359"/>
+                </a:lnTo>
+                <a:lnTo>
+                  <a:pt x="5250128" y="1951468"/>
+                </a:lnTo>
+                <a:lnTo>
+                  <a:pt x="5286336" y="1955536"/>
+                </a:lnTo>
+                <a:lnTo>
+                  <a:pt x="5322544" y="1959563"/>
+                </a:lnTo>
+                <a:lnTo>
+                  <a:pt x="5358752" y="1963549"/>
+                </a:lnTo>
+                <a:lnTo>
+                  <a:pt x="5394960" y="1967496"/>
+                </a:lnTo>
+              </a:path>
+            </a:pathLst>
+          </a:custGeom>
+          <a:noFill/>
+          <a:ln w="35560">
+            <a:solidFill>
+              <a:srgbClr val="F2B880"/>
+            </a:solidFill>
+          </a:ln>
+          <a:effectLst/>
+        </p:spPr>
+        <p:txBody>
+          <a:bodyPr rtlCol="0" anchor="ctr"/>
+          <a:lstStyle/>
+          <a:p>
+            <a:pPr algn="ctr"/>
+          </a:p>
+        </p:txBody>
+      </p:sp>
+      <p:sp>
+        <p:nvSpPr>
+          <p:cNvPr id="38" name="C1-E05 ellipse 36" descr="sci-ppt:o036"/>
+          <p:cNvSpPr/>
+          <p:nvPr/>
+        </p:nvSpPr>
+        <p:spPr>
+          <a:xfrm>
+            <a:off x="795528" y="3657600"/>
+            <a:ext cx="146304" cy="146304"/>
           </a:xfrm>
           <a:prstGeom prst="ellipse">
+            <a:avLst/>
+          </a:prstGeom>
+          <a:solidFill>
+            <a:srgbClr val="8EDBD4"/>
+          </a:solidFill>
+          <a:ln w="12700">
+            <a:solidFill>
+              <a:srgbClr val="8EDBD4"/>
+            </a:solidFill>
+          </a:ln>
+          <a:effectLst/>
+        </p:spPr>
+        <p:txBody>
+          <a:bodyPr rtlCol="0" anchor="ctr"/>
+          <a:lstStyle/>
+          <a:p>
+            <a:pPr algn="ctr"/>
+          </a:p>
+        </p:txBody>
+      </p:sp>
+      <p:sp>
+        <p:nvSpPr>
+          <p:cNvPr id="39" name="C1-E05 ellipse 37" descr="sci-ppt:o037"/>
+          <p:cNvSpPr/>
+          <p:nvPr/>
+        </p:nvSpPr>
+        <p:spPr>
+          <a:xfrm>
+            <a:off x="795528" y="1691639"/>
+            <a:ext cx="146304" cy="146304"/>
+          </a:xfrm>
+          <a:prstGeom prst="ellipse">
+            <a:avLst/>
+          </a:prstGeom>
+          <a:solidFill>
+            <a:srgbClr val="F2B880"/>
+          </a:solidFill>
+          <a:ln w="12700">
+            <a:solidFill>
+              <a:srgbClr val="F2B880"/>
+            </a:solidFill>
+          </a:ln>
+          <a:effectLst/>
+        </p:spPr>
+        <p:txBody>
+          <a:bodyPr rtlCol="0" anchor="ctr"/>
+          <a:lstStyle/>
+          <a:p>
+            <a:pPr algn="ctr"/>
+          </a:p>
+        </p:txBody>
+      </p:sp>
+      <p:sp>
+        <p:nvSpPr>
+          <p:cNvPr id="40" name="C1-E05 text 38" descr="sci-ppt:o038"/>
+          <p:cNvSpPr txBox="1"/>
+          <p:nvPr/>
+        </p:nvSpPr>
+        <p:spPr>
+          <a:xfrm>
+            <a:off x="3819144" y="3599992"/>
+            <a:ext cx="2011680" cy="417576"/>
+          </a:xfrm>
+          <a:prstGeom prst="rect">
+            <a:avLst/>
+          </a:prstGeom>
+          <a:noFill/>
+          <a:effectLst/>
+        </p:spPr>
+        <p:txBody>
+          <a:bodyPr wrap="none" lIns="18288" rIns="18288" tIns="18288" bIns="18288" anchor="t">
+            <a:spAutoFit/>
+          </a:bodyPr>
+          <a:lstStyle/>
+          <a:p>
+            <a:pPr algn="l">
+              <a:spcAft>
+                <a:spcPts val="0"/>
+              </a:spcAft>
+            </a:pPr>
+            <a:r>
+              <a:rPr sz="1200" b="0" i="0">
+                <a:solidFill>
+                  <a:srgbClr val="8EDBD4"/>
+                </a:solidFill>
+                <a:latin typeface="Arial"/>
+              </a:rPr>
+              <a:t>expanding, slowing</a:t>
+            </a:r>
+          </a:p>
+          <a:p>
+            <a:pPr algn="l">
+              <a:spcAft>
+                <a:spcPts val="0"/>
+              </a:spcAft>
+            </a:pPr>
+            <a:r>
+              <a:rPr sz="1200" b="0" i="0">
+                <a:solidFill>
+                  <a:srgbClr val="8EDBD4"/>
+                </a:solidFill>
+                <a:latin typeface="Arial"/>
+              </a:rPr>
+              <a:t>Ṙ = 1, R̈ = −0.5</a:t>
+            </a:r>
+          </a:p>
+        </p:txBody>
+      </p:sp>
+      <p:sp>
+        <p:nvSpPr>
+          <p:cNvPr id="41" name="C1-E05 text 39" descr="sci-ppt:o039"/>
+          <p:cNvSpPr txBox="1"/>
+          <p:nvPr/>
+        </p:nvSpPr>
+        <p:spPr>
+          <a:xfrm>
+            <a:off x="2200656" y="1313078"/>
+            <a:ext cx="2377440" cy="417576"/>
+          </a:xfrm>
+          <a:prstGeom prst="rect">
+            <a:avLst/>
+          </a:prstGeom>
+          <a:noFill/>
+          <a:effectLst/>
+        </p:spPr>
+        <p:txBody>
+          <a:bodyPr wrap="none" lIns="18288" rIns="18288" tIns="18288" bIns="18288" anchor="t">
+            <a:spAutoFit/>
+          </a:bodyPr>
+          <a:lstStyle/>
+          <a:p>
+            <a:pPr algn="l">
+              <a:spcAft>
+                <a:spcPts val="0"/>
+              </a:spcAft>
+            </a:pPr>
+            <a:r>
+              <a:rPr sz="1200" b="0" i="0">
+                <a:solidFill>
+                  <a:srgbClr val="F2B880"/>
+                </a:solidFill>
+                <a:latin typeface="Arial"/>
+              </a:rPr>
+              <a:t>collapsing, decelerating</a:t>
+            </a:r>
+          </a:p>
+          <a:p>
+            <a:pPr algn="l">
+              <a:spcAft>
+                <a:spcPts val="0"/>
+              </a:spcAft>
+            </a:pPr>
+            <a:r>
+              <a:rPr sz="1200" b="0" i="0">
+                <a:solidFill>
+                  <a:srgbClr val="F2B880"/>
+                </a:solidFill>
+                <a:latin typeface="Arial"/>
+              </a:rPr>
+              <a:t>Ṙ = −1, R̈ = +2</a:t>
+            </a:r>
+          </a:p>
+        </p:txBody>
+      </p:sp>
+      <p:sp>
+        <p:nvSpPr>
+          <p:cNvPr id="42" name="C1-E05 round_rect 40" descr="sci-ppt:o040"/>
+          <p:cNvSpPr/>
+          <p:nvPr/>
+        </p:nvSpPr>
+        <p:spPr>
+          <a:xfrm>
+            <a:off x="6583680" y="1325880"/>
+            <a:ext cx="5257800" cy="3246120"/>
+          </a:xfrm>
+          <a:prstGeom prst="roundRect">
             <a:avLst/>
           </a:prstGeom>
           <a:solidFill>
             <a:srgbClr val="213E4B"/>
           </a:solidFill>
-          <a:ln w="21590">
+          <a:ln w="20320">
+            <a:solidFill>
+              <a:srgbClr val="8EDBD4"/>
+            </a:solidFill>
+          </a:ln>
+          <a:effectLst/>
+        </p:spPr>
+        <p:txBody>
+          <a:bodyPr rtlCol="0" anchor="ctr"/>
+          <a:lstStyle/>
+          <a:p>
+            <a:pPr algn="ctr"/>
+          </a:p>
+        </p:txBody>
+      </p:sp>
+      <p:sp>
+        <p:nvSpPr>
+          <p:cNvPr id="43" name="C1-E05 text 41" descr="sci-ppt:o041"/>
+          <p:cNvSpPr txBox="1"/>
+          <p:nvPr/>
+        </p:nvSpPr>
+        <p:spPr>
+          <a:xfrm>
+            <a:off x="6693408" y="1380744"/>
+            <a:ext cx="5038344" cy="254889"/>
+          </a:xfrm>
+          <a:prstGeom prst="rect">
+            <a:avLst/>
+          </a:prstGeom>
+          <a:noFill/>
+          <a:effectLst/>
+        </p:spPr>
+        <p:txBody>
+          <a:bodyPr wrap="none" lIns="18288" rIns="18288" tIns="18288" bIns="18288" anchor="t">
+            <a:spAutoFit/>
+          </a:bodyPr>
+          <a:lstStyle/>
+          <a:p>
+            <a:pPr algn="l">
+              <a:spcAft>
+                <a:spcPts val="0"/>
+              </a:spcAft>
+            </a:pPr>
+            <a:r>
+              <a:rPr sz="1350" b="1" i="0">
+                <a:solidFill>
+                  <a:srgbClr val="8EDBD4"/>
+                </a:solidFill>
+                <a:latin typeface="Arial"/>
+              </a:rPr>
+              <a:t>The wall value has three pieces</a:t>
+            </a:r>
+          </a:p>
+        </p:txBody>
+      </p:sp>
+      <p:sp>
+        <p:nvSpPr>
+          <p:cNvPr id="44" name="C1-E05 text 42" descr="sci-ppt:o042"/>
+          <p:cNvSpPr txBox="1"/>
+          <p:nvPr/>
+        </p:nvSpPr>
+        <p:spPr>
+          <a:xfrm>
+            <a:off x="6720840" y="1783080"/>
+            <a:ext cx="5029200" cy="262636"/>
+          </a:xfrm>
+          <a:prstGeom prst="rect">
+            <a:avLst/>
+          </a:prstGeom>
+          <a:noFill/>
+          <a:effectLst/>
+        </p:spPr>
+        <p:txBody>
+          <a:bodyPr wrap="none" lIns="18288" rIns="18288" tIns="18288" bIns="18288" anchor="t">
+            <a:spAutoFit/>
+          </a:bodyPr>
+          <a:lstStyle/>
+          <a:p>
+            <a:pPr algn="l">
+              <a:spcAft>
+                <a:spcPts val="0"/>
+              </a:spcAft>
+            </a:pPr>
+            <a:r>
+              <a:rPr sz="1400" b="1" i="0">
+                <a:solidFill>
+                  <a:srgbClr val="E7F0F3"/>
+                </a:solidFill>
+                <a:latin typeface="Arial"/>
+              </a:rPr>
+              <a:t>pₗ − p∞ = ρ [ R R̈ + 2Ṙ² − Ṙ²/2 ]</a:t>
+            </a:r>
+          </a:p>
+        </p:txBody>
+      </p:sp>
+      <p:cxnSp>
+        <p:nvCxnSpPr>
+          <p:cNvPr id="45" name="C1-E05 line 43" descr="sci-ppt:o043"/>
+          <p:cNvCxnSpPr/>
+          <p:nvPr/>
+        </p:nvCxnSpPr>
+        <p:spPr>
+          <a:xfrm>
+            <a:off x="9966960" y="2286000"/>
+            <a:ext cx="0" cy="1417320"/>
+          </a:xfrm>
+          <a:prstGeom prst="line">
+            <a:avLst/>
+          </a:prstGeom>
+          <a:ln w="15240">
             <a:solidFill>
               <a:srgbClr val="B4C7D2"/>
             </a:solidFill>
           </a:ln>
           <a:effectLst/>
         </p:spPr>
-        <p:txBody>
-          <a:bodyPr rtlCol="0" anchor="ctr"/>
-          <a:lstStyle/>
-          <a:p>
-            <a:pPr algn="ctr"/>
-          </a:p>
-        </p:txBody>
-      </p:sp>
-      <p:cxnSp>
-        <p:nvCxnSpPr>
-          <p:cNvPr id="4" name="arrow3" descr="sci-ppt:C1-E05-003"/>
-          <p:cNvCxnSpPr/>
-          <p:nvPr/>
-        </p:nvCxnSpPr>
-        <p:spPr>
-          <a:xfrm>
-            <a:off x="3291840" y="2621280"/>
-            <a:ext cx="1219200" cy="0"/>
-          </a:xfrm>
-          <a:prstGeom prst="line">
-            <a:avLst/>
-          </a:prstGeom>
-          <a:ln w="25400">
-            <a:solidFill>
-              <a:srgbClr val="8EDBD4"/>
-            </a:solidFill>
-            <a:headEnd type="none" w="med" len="med"/>
-            <a:tailEnd type="triangle" w="med" len="med"/>
-          </a:ln>
-          <a:effectLst/>
-        </p:spPr>
       </p:cxnSp>
       <p:sp>
         <p:nvSpPr>
-          <p:cNvPr id="5" name="text4" descr="sci-ppt:C1-E05-004"/>
+          <p:cNvPr id="46" name="C1-E05 text 44" descr="sci-ppt:o044"/>
           <p:cNvSpPr txBox="1"/>
           <p:nvPr/>
         </p:nvSpPr>
         <p:spPr>
           <a:xfrm>
-            <a:off x="3474720" y="2133600"/>
-            <a:ext cx="1584960" cy="396849"/>
+            <a:off x="6720840" y="2286000"/>
+            <a:ext cx="914400" cy="247142"/>
           </a:xfrm>
           <a:prstGeom prst="rect">
             <a:avLst/>
@@ -3210,7 +5364,7 @@
           <a:effectLst/>
         </p:spPr>
         <p:txBody>
-          <a:bodyPr wrap="none" lIns="27432" rIns="27432" tIns="18288" bIns="18288" anchor="ctr">
+          <a:bodyPr wrap="none" lIns="18288" rIns="18288" tIns="18288" bIns="18288" anchor="t">
             <a:spAutoFit/>
           </a:bodyPr>
           <a:lstStyle/>
@@ -3221,27 +5375,419 @@
               </a:spcAft>
             </a:pPr>
             <a:r>
-              <a:rPr sz="2016" b="0" i="0">
+              <a:rPr sz="1300" b="1" i="0">
+                <a:solidFill>
+                  <a:srgbClr val="7FC8F8"/>
+                </a:solidFill>
+                <a:latin typeface="Arial"/>
+              </a:rPr>
+              <a:t>R R̈</a:t>
+            </a:r>
+          </a:p>
+        </p:txBody>
+      </p:sp>
+      <p:sp>
+        <p:nvSpPr>
+          <p:cNvPr id="47" name="C1-E05 text 45" descr="sci-ppt:o045"/>
+          <p:cNvSpPr txBox="1"/>
+          <p:nvPr/>
+        </p:nvSpPr>
+        <p:spPr>
+          <a:xfrm>
+            <a:off x="7589520" y="2304288"/>
+            <a:ext cx="1920240" cy="216153"/>
+          </a:xfrm>
+          <a:prstGeom prst="rect">
+            <a:avLst/>
+          </a:prstGeom>
+          <a:noFill/>
+          <a:effectLst/>
+        </p:spPr>
+        <p:txBody>
+          <a:bodyPr wrap="none" lIns="18288" rIns="18288" tIns="18288" bIns="18288" anchor="t">
+            <a:spAutoFit/>
+          </a:bodyPr>
+          <a:lstStyle/>
+          <a:p>
+            <a:pPr algn="l">
+              <a:spcAft>
+                <a:spcPts val="0"/>
+              </a:spcAft>
+            </a:pPr>
+            <a:r>
+              <a:rPr sz="1100" b="0" i="0">
+                <a:solidFill>
+                  <a:srgbClr val="B4C7D2"/>
+                </a:solidFill>
+                <a:latin typeface="Arial"/>
+              </a:rPr>
+              <a:t>wall acceleration</a:t>
+            </a:r>
+          </a:p>
+        </p:txBody>
+      </p:sp>
+      <p:sp>
+        <p:nvSpPr>
+          <p:cNvPr id="48" name="C1-E05 rect 46" descr="sci-ppt:o046"/>
+          <p:cNvSpPr/>
+          <p:nvPr/>
+        </p:nvSpPr>
+        <p:spPr>
+          <a:xfrm>
+            <a:off x="9715500" y="2331720"/>
+            <a:ext cx="251460" cy="274320"/>
+          </a:xfrm>
+          <a:prstGeom prst="rect">
+            <a:avLst/>
+          </a:prstGeom>
+          <a:solidFill>
+            <a:srgbClr val="7FC8F8"/>
+          </a:solidFill>
+          <a:ln w="12700">
+            <a:solidFill>
+              <a:srgbClr val="7FC8F8"/>
+            </a:solidFill>
+          </a:ln>
+          <a:effectLst/>
+        </p:spPr>
+        <p:txBody>
+          <a:bodyPr rtlCol="0" anchor="ctr"/>
+          <a:lstStyle/>
+          <a:p>
+            <a:pPr algn="ctr"/>
+          </a:p>
+        </p:txBody>
+      </p:sp>
+      <p:sp>
+        <p:nvSpPr>
+          <p:cNvPr id="49" name="C1-E05 text 47" descr="sci-ppt:o047"/>
+          <p:cNvSpPr txBox="1"/>
+          <p:nvPr/>
+        </p:nvSpPr>
+        <p:spPr>
+          <a:xfrm>
+            <a:off x="6720840" y="2743200"/>
+            <a:ext cx="914400" cy="247142"/>
+          </a:xfrm>
+          <a:prstGeom prst="rect">
+            <a:avLst/>
+          </a:prstGeom>
+          <a:noFill/>
+          <a:effectLst/>
+        </p:spPr>
+        <p:txBody>
+          <a:bodyPr wrap="none" lIns="18288" rIns="18288" tIns="18288" bIns="18288" anchor="t">
+            <a:spAutoFit/>
+          </a:bodyPr>
+          <a:lstStyle/>
+          <a:p>
+            <a:pPr algn="l">
+              <a:spcAft>
+                <a:spcPts val="0"/>
+              </a:spcAft>
+            </a:pPr>
+            <a:r>
+              <a:rPr sz="1300" b="1" i="0">
+                <a:solidFill>
+                  <a:srgbClr val="8EDBD4"/>
+                </a:solidFill>
+                <a:latin typeface="Arial"/>
+              </a:rPr>
+              <a:t>2Ṙ²</a:t>
+            </a:r>
+          </a:p>
+        </p:txBody>
+      </p:sp>
+      <p:sp>
+        <p:nvSpPr>
+          <p:cNvPr id="50" name="C1-E05 text 48" descr="sci-ppt:o048"/>
+          <p:cNvSpPr txBox="1"/>
+          <p:nvPr/>
+        </p:nvSpPr>
+        <p:spPr>
+          <a:xfrm>
+            <a:off x="7589520" y="2761488"/>
+            <a:ext cx="1920240" cy="216153"/>
+          </a:xfrm>
+          <a:prstGeom prst="rect">
+            <a:avLst/>
+          </a:prstGeom>
+          <a:noFill/>
+          <a:effectLst/>
+        </p:spPr>
+        <p:txBody>
+          <a:bodyPr wrap="none" lIns="18288" rIns="18288" tIns="18288" bIns="18288" anchor="t">
+            <a:spAutoFit/>
+          </a:bodyPr>
+          <a:lstStyle/>
+          <a:p>
+            <a:pPr algn="l">
+              <a:spcAft>
+                <a:spcPts val="0"/>
+              </a:spcAft>
+            </a:pPr>
+            <a:r>
+              <a:rPr sz="1100" b="0" i="0">
+                <a:solidFill>
+                  <a:srgbClr val="B4C7D2"/>
+                </a:solidFill>
+                <a:latin typeface="Arial"/>
+              </a:rPr>
+              <a:t>unsteady potential</a:t>
+            </a:r>
+          </a:p>
+        </p:txBody>
+      </p:sp>
+      <p:sp>
+        <p:nvSpPr>
+          <p:cNvPr id="51" name="C1-E05 rect 49" descr="sci-ppt:o049"/>
+          <p:cNvSpPr/>
+          <p:nvPr/>
+        </p:nvSpPr>
+        <p:spPr>
+          <a:xfrm>
+            <a:off x="9966960" y="2788920"/>
+            <a:ext cx="1005840" cy="274320"/>
+          </a:xfrm>
+          <a:prstGeom prst="rect">
+            <a:avLst/>
+          </a:prstGeom>
+          <a:solidFill>
+            <a:srgbClr val="8EDBD4"/>
+          </a:solidFill>
+          <a:ln w="12700">
+            <a:solidFill>
+              <a:srgbClr val="8EDBD4"/>
+            </a:solidFill>
+          </a:ln>
+          <a:effectLst/>
+        </p:spPr>
+        <p:txBody>
+          <a:bodyPr rtlCol="0" anchor="ctr"/>
+          <a:lstStyle/>
+          <a:p>
+            <a:pPr algn="ctr"/>
+          </a:p>
+        </p:txBody>
+      </p:sp>
+      <p:sp>
+        <p:nvSpPr>
+          <p:cNvPr id="52" name="C1-E05 text 50" descr="sci-ppt:o050"/>
+          <p:cNvSpPr txBox="1"/>
+          <p:nvPr/>
+        </p:nvSpPr>
+        <p:spPr>
+          <a:xfrm>
+            <a:off x="6720840" y="3200400"/>
+            <a:ext cx="914400" cy="247142"/>
+          </a:xfrm>
+          <a:prstGeom prst="rect">
+            <a:avLst/>
+          </a:prstGeom>
+          <a:noFill/>
+          <a:effectLst/>
+        </p:spPr>
+        <p:txBody>
+          <a:bodyPr wrap="none" lIns="18288" rIns="18288" tIns="18288" bIns="18288" anchor="t">
+            <a:spAutoFit/>
+          </a:bodyPr>
+          <a:lstStyle/>
+          <a:p>
+            <a:pPr algn="l">
+              <a:spcAft>
+                <a:spcPts val="0"/>
+              </a:spcAft>
+            </a:pPr>
+            <a:r>
+              <a:rPr sz="1300" b="1" i="0">
+                <a:solidFill>
+                  <a:srgbClr val="F28BA0"/>
+                </a:solidFill>
+                <a:latin typeface="Arial"/>
+              </a:rPr>
+              <a:t>−Ṙ²/2</a:t>
+            </a:r>
+          </a:p>
+        </p:txBody>
+      </p:sp>
+      <p:sp>
+        <p:nvSpPr>
+          <p:cNvPr id="53" name="C1-E05 text 51" descr="sci-ppt:o051"/>
+          <p:cNvSpPr txBox="1"/>
+          <p:nvPr/>
+        </p:nvSpPr>
+        <p:spPr>
+          <a:xfrm>
+            <a:off x="7589520" y="3218688"/>
+            <a:ext cx="1920240" cy="216153"/>
+          </a:xfrm>
+          <a:prstGeom prst="rect">
+            <a:avLst/>
+          </a:prstGeom>
+          <a:noFill/>
+          <a:effectLst/>
+        </p:spPr>
+        <p:txBody>
+          <a:bodyPr wrap="none" lIns="18288" rIns="18288" tIns="18288" bIns="18288" anchor="t">
+            <a:spAutoFit/>
+          </a:bodyPr>
+          <a:lstStyle/>
+          <a:p>
+            <a:pPr algn="l">
+              <a:spcAft>
+                <a:spcPts val="0"/>
+              </a:spcAft>
+            </a:pPr>
+            <a:r>
+              <a:rPr sz="1100" b="0" i="0">
+                <a:solidFill>
+                  <a:srgbClr val="B4C7D2"/>
+                </a:solidFill>
+                <a:latin typeface="Arial"/>
+              </a:rPr>
+              <a:t>Bernoulli kinetic term</a:t>
+            </a:r>
+          </a:p>
+        </p:txBody>
+      </p:sp>
+      <p:sp>
+        <p:nvSpPr>
+          <p:cNvPr id="54" name="C1-E05 rect 52" descr="sci-ppt:o052"/>
+          <p:cNvSpPr/>
+          <p:nvPr/>
+        </p:nvSpPr>
+        <p:spPr>
+          <a:xfrm>
+            <a:off x="9715500" y="3246120"/>
+            <a:ext cx="251460" cy="274320"/>
+          </a:xfrm>
+          <a:prstGeom prst="rect">
+            <a:avLst/>
+          </a:prstGeom>
+          <a:solidFill>
+            <a:srgbClr val="F28BA0"/>
+          </a:solidFill>
+          <a:ln w="12700">
+            <a:solidFill>
+              <a:srgbClr val="F28BA0"/>
+            </a:solidFill>
+          </a:ln>
+          <a:effectLst/>
+        </p:spPr>
+        <p:txBody>
+          <a:bodyPr rtlCol="0" anchor="ctr"/>
+          <a:lstStyle/>
+          <a:p>
+            <a:pPr algn="ctr"/>
+          </a:p>
+        </p:txBody>
+      </p:sp>
+      <p:sp>
+        <p:nvSpPr>
+          <p:cNvPr id="55" name="C1-E05 text 53" descr="sci-ppt:o053"/>
+          <p:cNvSpPr txBox="1"/>
+          <p:nvPr/>
+        </p:nvSpPr>
+        <p:spPr>
+          <a:xfrm>
+            <a:off x="6720840" y="3840480"/>
+            <a:ext cx="5029200" cy="239395"/>
+          </a:xfrm>
+          <a:prstGeom prst="rect">
+            <a:avLst/>
+          </a:prstGeom>
+          <a:noFill/>
+          <a:effectLst/>
+        </p:spPr>
+        <p:txBody>
+          <a:bodyPr wrap="none" lIns="18288" rIns="18288" tIns="18288" bIns="18288" anchor="t">
+            <a:spAutoFit/>
+          </a:bodyPr>
+          <a:lstStyle/>
+          <a:p>
+            <a:pPr algn="l">
+              <a:spcAft>
+                <a:spcPts val="0"/>
+              </a:spcAft>
+            </a:pPr>
+            <a:r>
+              <a:rPr sz="1250" b="0" i="0">
+                <a:solidFill>
+                  <a:srgbClr val="F2B880"/>
+                </a:solidFill>
+                <a:latin typeface="Arial"/>
+              </a:rPr>
+              <a:t>Expanding case: −0.5 + 2 − 0.5 = 1.0 = R R̈ + 3Ṙ²/2</a:t>
+            </a:r>
+          </a:p>
+        </p:txBody>
+      </p:sp>
+      <p:sp>
+        <p:nvSpPr>
+          <p:cNvPr id="56" name="C1-E05 text 54" descr="sci-ppt:o054"/>
+          <p:cNvSpPr txBox="1"/>
+          <p:nvPr/>
+        </p:nvSpPr>
+        <p:spPr>
+          <a:xfrm>
+            <a:off x="6583680" y="4754880"/>
+            <a:ext cx="5257800" cy="448563"/>
+          </a:xfrm>
+          <a:prstGeom prst="rect">
+            <a:avLst/>
+          </a:prstGeom>
+          <a:noFill/>
+          <a:effectLst/>
+        </p:spPr>
+        <p:txBody>
+          <a:bodyPr wrap="none" lIns="18288" rIns="18288" tIns="18288" bIns="18288" anchor="t">
+            <a:spAutoFit/>
+          </a:bodyPr>
+          <a:lstStyle/>
+          <a:p>
+            <a:pPr algn="l">
+              <a:spcAft>
+                <a:spcPts val="0"/>
+              </a:spcAft>
+            </a:pPr>
+            <a:r>
+              <a:rPr sz="1300" b="0" i="0">
                 <a:solidFill>
                   <a:srgbClr val="E7F0F3"/>
                 </a:solidFill>
                 <a:latin typeface="Arial"/>
               </a:rPr>
-              <a:t>R(t)</a:t>
-            </a:r>
-          </a:p>
-        </p:txBody>
-      </p:sp>
-      <p:sp>
-        <p:nvSpPr>
-          <p:cNvPr id="6" name="text5" descr="sci-ppt:C1-E05-005"/>
+              <a:t>The pressure is stored in the liquid by its inertia: pₗ</a:t>
+            </a:r>
+          </a:p>
+          <a:p>
+            <a:pPr algn="l">
+              <a:spcAft>
+                <a:spcPts val="0"/>
+              </a:spcAft>
+            </a:pPr>
+            <a:r>
+              <a:rPr sz="1300" b="0" i="0">
+                <a:solidFill>
+                  <a:srgbClr val="E7F0F3"/>
+                </a:solidFill>
+                <a:latin typeface="Arial"/>
+              </a:rPr>
+              <a:t>exceeds p∞ whenever R R̈ + 3Ṙ²/2 &gt; 0.</a:t>
+            </a:r>
+          </a:p>
+        </p:txBody>
+      </p:sp>
+      <p:sp>
+        <p:nvSpPr>
+          <p:cNvPr id="57" name="C1-E05 text 55" descr="sci-ppt:o055"/>
           <p:cNvSpPr txBox="1"/>
           <p:nvPr/>
         </p:nvSpPr>
         <p:spPr>
           <a:xfrm>
-            <a:off x="2682240" y="2804160"/>
-            <a:ext cx="2194560" cy="377952"/>
+            <a:off x="6583680" y="5577840"/>
+            <a:ext cx="5257800" cy="433070"/>
           </a:xfrm>
           <a:prstGeom prst="rect">
             <a:avLst/>
@@ -3250,7 +5796,7 @@
           <a:effectLst/>
         </p:spPr>
         <p:txBody>
-          <a:bodyPr wrap="none" lIns="27432" rIns="27432" tIns="18288" bIns="18288" anchor="ctr">
+          <a:bodyPr wrap="none" lIns="18288" rIns="18288" tIns="18288" bIns="18288" anchor="t">
             <a:spAutoFit/>
           </a:bodyPr>
           <a:lstStyle/>
@@ -3261,27 +5807,43 @@
               </a:spcAft>
             </a:pPr>
             <a:r>
-              <a:rPr sz="1920" b="0" i="0">
+              <a:rPr sz="1250" b="0" i="0">
                 <a:solidFill>
-                  <a:srgbClr val="E7F0F3"/>
+                  <a:srgbClr val="B4C7D2"/>
                 </a:solidFill>
                 <a:latin typeface="Arial"/>
               </a:rPr>
-              <a:t>p_b</a:t>
-            </a:r>
-          </a:p>
-        </p:txBody>
-      </p:sp>
-      <p:sp>
-        <p:nvSpPr>
-          <p:cNvPr id="7" name="text6" descr="sci-ppt:C1-E05-006"/>
+              <a:t>Far away the acceleration term decays as 1/r, the Ṙ² term as</a:t>
+            </a:r>
+          </a:p>
+          <a:p>
+            <a:pPr algn="l">
+              <a:spcAft>
+                <a:spcPts val="0"/>
+              </a:spcAft>
+            </a:pPr>
+            <a:r>
+              <a:rPr sz="1250" b="0" i="0">
+                <a:solidFill>
+                  <a:srgbClr val="B4C7D2"/>
+                </a:solidFill>
+                <a:latin typeface="Arial"/>
+              </a:rPr>
+              <a:t>1/r⁴.</a:t>
+            </a:r>
+          </a:p>
+        </p:txBody>
+      </p:sp>
+      <p:sp>
+        <p:nvSpPr>
+          <p:cNvPr id="58" name="C1-E05 text 56" descr="sci-ppt:o056"/>
           <p:cNvSpPr txBox="1"/>
           <p:nvPr/>
         </p:nvSpPr>
         <p:spPr>
           <a:xfrm>
-            <a:off x="5242560" y="1524000"/>
-            <a:ext cx="4876800" cy="415747"/>
+            <a:off x="320040" y="6510528"/>
+            <a:ext cx="11521440" cy="200660"/>
           </a:xfrm>
           <a:prstGeom prst="rect">
             <a:avLst/>
@@ -3290,7 +5852,7 @@
           <a:effectLst/>
         </p:spPr>
         <p:txBody>
-          <a:bodyPr wrap="none" lIns="27432" rIns="27432" tIns="18288" bIns="18288" anchor="ctr">
+          <a:bodyPr wrap="none" lIns="18288" rIns="18288" tIns="18288" bIns="18288" anchor="t">
             <a:spAutoFit/>
           </a:bodyPr>
           <a:lstStyle/>
@@ -3301,581 +5863,13 @@
               </a:spcAft>
             </a:pPr>
             <a:r>
-              <a:rPr sz="2111" b="0" i="0">
-                <a:solidFill>
-                  <a:srgbClr val="E7F0F3"/>
-                </a:solidFill>
-                <a:latin typeface="Arial"/>
-              </a:rPr>
-              <a:t>Surrounding liquid</a:t>
-            </a:r>
-          </a:p>
-        </p:txBody>
-      </p:sp>
-      <p:sp>
-        <p:nvSpPr>
-          <p:cNvPr id="8" name="text7" descr="sci-ppt:C1-E05-007"/>
-          <p:cNvSpPr txBox="1"/>
-          <p:nvPr/>
-        </p:nvSpPr>
-        <p:spPr>
-          <a:xfrm>
-            <a:off x="5242560" y="1987296"/>
-            <a:ext cx="5852160" cy="359054"/>
-          </a:xfrm>
-          <a:prstGeom prst="rect">
-            <a:avLst/>
-          </a:prstGeom>
-          <a:noFill/>
-          <a:effectLst/>
-        </p:spPr>
-        <p:txBody>
-          <a:bodyPr wrap="none" lIns="27432" rIns="27432" tIns="18288" bIns="18288" anchor="ctr">
-            <a:spAutoFit/>
-          </a:bodyPr>
-          <a:lstStyle/>
-          <a:p>
-            <a:pPr algn="l">
-              <a:spcAft>
-                <a:spcPts val="0"/>
-              </a:spcAft>
-            </a:pPr>
-            <a:r>
-              <a:rPr sz="1823" b="0" i="0">
-                <a:solidFill>
-                  <a:srgbClr val="E7F0F3"/>
-                </a:solidFill>
-                <a:latin typeface="Arial"/>
-              </a:rPr>
-              <a:t>p∞, ρ, μ; interface: σ</a:t>
-            </a:r>
-          </a:p>
-        </p:txBody>
-      </p:sp>
-      <p:cxnSp>
-        <p:nvCxnSpPr>
-          <p:cNvPr id="9" name="arrow8" descr="sci-ppt:C1-E05-008"/>
-          <p:cNvCxnSpPr/>
-          <p:nvPr/>
-        </p:nvCxnSpPr>
-        <p:spPr>
-          <a:xfrm>
-            <a:off x="3291840" y="2621280"/>
-            <a:ext cx="1706880" cy="1158240"/>
-          </a:xfrm>
-          <a:prstGeom prst="line">
-            <a:avLst/>
-          </a:prstGeom>
-          <a:ln w="25400">
-            <a:solidFill>
-              <a:srgbClr val="8EDBD4"/>
-            </a:solidFill>
-            <a:headEnd type="none" w="med" len="med"/>
-            <a:tailEnd type="triangle" w="med" len="med"/>
-          </a:ln>
-          <a:effectLst/>
-        </p:spPr>
-      </p:cxnSp>
-      <p:sp>
-        <p:nvSpPr>
-          <p:cNvPr id="10" name="text9" descr="sci-ppt:C1-E05-009"/>
-          <p:cNvSpPr txBox="1"/>
-          <p:nvPr/>
-        </p:nvSpPr>
-        <p:spPr>
-          <a:xfrm>
-            <a:off x="5364480" y="3657600"/>
-            <a:ext cx="1950720" cy="340156"/>
-          </a:xfrm>
-          <a:prstGeom prst="rect">
-            <a:avLst/>
-          </a:prstGeom>
-          <a:noFill/>
-          <a:effectLst/>
-        </p:spPr>
-        <p:txBody>
-          <a:bodyPr wrap="none" lIns="27432" rIns="27432" tIns="18288" bIns="18288" anchor="ctr">
-            <a:spAutoFit/>
-          </a:bodyPr>
-          <a:lstStyle/>
-          <a:p>
-            <a:pPr algn="l">
-              <a:spcAft>
-                <a:spcPts val="0"/>
-              </a:spcAft>
-            </a:pPr>
-            <a:r>
-              <a:rPr sz="1728" b="0" i="0">
-                <a:solidFill>
-                  <a:srgbClr val="E7F0F3"/>
-                </a:solidFill>
-                <a:latin typeface="Arial"/>
-              </a:rPr>
-              <a:t>r ≥ R</a:t>
-            </a:r>
-          </a:p>
-        </p:txBody>
-      </p:sp>
-      <p:cxnSp>
-        <p:nvCxnSpPr>
-          <p:cNvPr id="11" name="arrow10" descr="sci-ppt:C1-E05-010"/>
-          <p:cNvCxnSpPr/>
-          <p:nvPr/>
-        </p:nvCxnSpPr>
-        <p:spPr>
-          <a:xfrm>
-            <a:off x="4998720" y="2621280"/>
-            <a:ext cx="792480" cy="0"/>
-          </a:xfrm>
-          <a:prstGeom prst="line">
-            <a:avLst/>
-          </a:prstGeom>
-          <a:ln w="25400">
-            <a:solidFill>
-              <a:srgbClr val="8EDBD4"/>
-            </a:solidFill>
-            <a:headEnd type="none" w="med" len="med"/>
-            <a:tailEnd type="triangle" w="med" len="med"/>
-          </a:ln>
-          <a:effectLst/>
-        </p:spPr>
-      </p:cxnSp>
-      <p:sp>
-        <p:nvSpPr>
-          <p:cNvPr id="12" name="text11" descr="sci-ppt:C1-E05-011"/>
-          <p:cNvSpPr txBox="1"/>
-          <p:nvPr/>
-        </p:nvSpPr>
-        <p:spPr>
-          <a:xfrm>
-            <a:off x="5059680" y="2865120"/>
-            <a:ext cx="3291840" cy="321259"/>
-          </a:xfrm>
-          <a:prstGeom prst="rect">
-            <a:avLst/>
-          </a:prstGeom>
-          <a:noFill/>
-          <a:effectLst/>
-        </p:spPr>
-        <p:txBody>
-          <a:bodyPr wrap="none" lIns="27432" rIns="27432" tIns="18288" bIns="18288" anchor="ctr">
-            <a:spAutoFit/>
-          </a:bodyPr>
-          <a:lstStyle/>
-          <a:p>
-            <a:pPr algn="l">
-              <a:spcAft>
-                <a:spcPts val="0"/>
-              </a:spcAft>
-            </a:pPr>
-            <a:r>
-              <a:rPr sz="1632" b="0" i="0">
-                <a:solidFill>
-                  <a:srgbClr val="E7F0F3"/>
-                </a:solidFill>
-                <a:latin typeface="Arial"/>
-              </a:rPr>
-              <a:t>+e_r (coordinate)</a:t>
-            </a:r>
-          </a:p>
-        </p:txBody>
-      </p:sp>
-      <p:sp>
-        <p:nvSpPr>
-          <p:cNvPr id="13" name="text12" descr="sci-ppt:C1-E05-012"/>
-          <p:cNvSpPr txBox="1"/>
-          <p:nvPr/>
-        </p:nvSpPr>
-        <p:spPr>
-          <a:xfrm>
-            <a:off x="1219200" y="4206240"/>
-            <a:ext cx="9753600" cy="340156"/>
-          </a:xfrm>
-          <a:prstGeom prst="rect">
-            <a:avLst/>
-          </a:prstGeom>
-          <a:noFill/>
-          <a:effectLst/>
-        </p:spPr>
-        <p:txBody>
-          <a:bodyPr wrap="none" lIns="27432" rIns="27432" tIns="18288" bIns="18288" anchor="ctr">
-            <a:spAutoFit/>
-          </a:bodyPr>
-          <a:lstStyle/>
-          <a:p>
-            <a:pPr algn="l">
-              <a:spcAft>
-                <a:spcPts val="0"/>
-              </a:spcAft>
-            </a:pPr>
-            <a:r>
-              <a:rPr sz="1728" b="0" i="0">
-                <a:solidFill>
-                  <a:srgbClr val="E7F0F3"/>
-                </a:solidFill>
-                <a:latin typeface="Arial"/>
-              </a:rPr>
-              <a:t>Signed wall speed: Ṙ; acceleration: R̈</a:t>
-            </a:r>
-          </a:p>
-        </p:txBody>
-      </p:sp>
-      <p:sp>
-        <p:nvSpPr>
-          <p:cNvPr id="14" name="text13" descr="sci-ppt:C1-E05-013"/>
-          <p:cNvSpPr txBox="1"/>
-          <p:nvPr/>
-        </p:nvSpPr>
-        <p:spPr>
-          <a:xfrm>
-            <a:off x="365760" y="4974336"/>
-            <a:ext cx="5547360" cy="321259"/>
-          </a:xfrm>
-          <a:prstGeom prst="rect">
-            <a:avLst/>
-          </a:prstGeom>
-          <a:noFill/>
-          <a:effectLst/>
-        </p:spPr>
-        <p:txBody>
-          <a:bodyPr wrap="none" lIns="27432" rIns="27432" tIns="18288" bIns="18288" anchor="ctr">
-            <a:spAutoFit/>
-          </a:bodyPr>
-          <a:lstStyle/>
-          <a:p>
-            <a:pPr algn="l">
-              <a:spcAft>
-                <a:spcPts val="0"/>
-              </a:spcAft>
-            </a:pPr>
-            <a:r>
-              <a:rPr sz="1632" b="0" i="0">
-                <a:solidFill>
-                  <a:srgbClr val="E7F0F3"/>
-                </a:solidFill>
-                <a:latin typeface="Arial"/>
-              </a:rPr>
-              <a:t>pl at r = R</a:t>
-            </a:r>
-          </a:p>
-        </p:txBody>
-      </p:sp>
-      <p:sp>
-        <p:nvSpPr>
-          <p:cNvPr id="15" name="text14" descr="sci-ppt:C1-E05-014"/>
-          <p:cNvSpPr txBox="1"/>
-          <p:nvPr/>
-        </p:nvSpPr>
-        <p:spPr>
-          <a:xfrm>
-            <a:off x="365760" y="5266944"/>
-            <a:ext cx="5547360" cy="321259"/>
-          </a:xfrm>
-          <a:prstGeom prst="rect">
-            <a:avLst/>
-          </a:prstGeom>
-          <a:noFill/>
-          <a:effectLst/>
-        </p:spPr>
-        <p:txBody>
-          <a:bodyPr wrap="none" lIns="27432" rIns="27432" tIns="18288" bIns="18288" anchor="ctr">
-            <a:spAutoFit/>
-          </a:bodyPr>
-          <a:lstStyle/>
-          <a:p>
-            <a:pPr algn="l">
-              <a:spcAft>
-                <a:spcPts val="0"/>
-              </a:spcAft>
-            </a:pPr>
-            <a:r>
-              <a:rPr sz="1632" b="0" i="0">
-                <a:solidFill>
-                  <a:srgbClr val="E7F0F3"/>
-                </a:solidFill>
-                <a:latin typeface="Arial"/>
-              </a:rPr>
-              <a:t>ρ</a:t>
-            </a:r>
-          </a:p>
-        </p:txBody>
-      </p:sp>
-      <p:sp>
-        <p:nvSpPr>
-          <p:cNvPr id="16" name="text15" descr="sci-ppt:C1-E05-015"/>
-          <p:cNvSpPr txBox="1"/>
-          <p:nvPr/>
-        </p:nvSpPr>
-        <p:spPr>
-          <a:xfrm>
-            <a:off x="365760" y="5559552"/>
-            <a:ext cx="5547360" cy="321259"/>
-          </a:xfrm>
-          <a:prstGeom prst="rect">
-            <a:avLst/>
-          </a:prstGeom>
-          <a:noFill/>
-          <a:effectLst/>
-        </p:spPr>
-        <p:txBody>
-          <a:bodyPr wrap="none" lIns="27432" rIns="27432" tIns="18288" bIns="18288" anchor="ctr">
-            <a:spAutoFit/>
-          </a:bodyPr>
-          <a:lstStyle/>
-          <a:p>
-            <a:pPr algn="l">
-              <a:spcAft>
-                <a:spcPts val="0"/>
-              </a:spcAft>
-            </a:pPr>
-            <a:r>
-              <a:rPr sz="1632" b="0" i="0">
-                <a:solidFill>
-                  <a:srgbClr val="E7F0F3"/>
-                </a:solidFill>
-                <a:latin typeface="Arial"/>
-              </a:rPr>
-              <a:t>u(R,t) = Ṙ</a:t>
-            </a:r>
-          </a:p>
-        </p:txBody>
-      </p:sp>
-      <p:sp>
-        <p:nvSpPr>
-          <p:cNvPr id="17" name="text16" descr="sci-ppt:C1-E05-016"/>
-          <p:cNvSpPr txBox="1"/>
-          <p:nvPr/>
-        </p:nvSpPr>
-        <p:spPr>
-          <a:xfrm>
-            <a:off x="365760" y="5852160"/>
-            <a:ext cx="5547360" cy="321259"/>
-          </a:xfrm>
-          <a:prstGeom prst="rect">
-            <a:avLst/>
-          </a:prstGeom>
-          <a:noFill/>
-          <a:effectLst/>
-        </p:spPr>
-        <p:txBody>
-          <a:bodyPr wrap="none" lIns="27432" rIns="27432" tIns="18288" bIns="18288" anchor="ctr">
-            <a:spAutoFit/>
-          </a:bodyPr>
-          <a:lstStyle/>
-          <a:p>
-            <a:pPr algn="l">
-              <a:spcAft>
-                <a:spcPts val="0"/>
-              </a:spcAft>
-            </a:pPr>
-            <a:r>
-              <a:rPr sz="1632" b="0" i="0">
-                <a:solidFill>
-                  <a:srgbClr val="E7F0F3"/>
-                </a:solidFill>
-                <a:latin typeface="Arial"/>
-              </a:rPr>
-              <a:t>r</a:t>
-            </a:r>
-          </a:p>
-        </p:txBody>
-      </p:sp>
-      <p:sp>
-        <p:nvSpPr>
-          <p:cNvPr id="18" name="text17" descr="sci-ppt:C1-E05-017"/>
-          <p:cNvSpPr txBox="1"/>
-          <p:nvPr/>
-        </p:nvSpPr>
-        <p:spPr>
-          <a:xfrm>
-            <a:off x="6156960" y="4974336"/>
-            <a:ext cx="5547360" cy="321259"/>
-          </a:xfrm>
-          <a:prstGeom prst="rect">
-            <a:avLst/>
-          </a:prstGeom>
-          <a:noFill/>
-          <a:effectLst/>
-        </p:spPr>
-        <p:txBody>
-          <a:bodyPr wrap="none" lIns="27432" rIns="27432" tIns="18288" bIns="18288" anchor="ctr">
-            <a:spAutoFit/>
-          </a:bodyPr>
-          <a:lstStyle/>
-          <a:p>
-            <a:pPr algn="l">
-              <a:spcAft>
-                <a:spcPts val="0"/>
-              </a:spcAft>
-            </a:pPr>
-            <a:r>
-              <a:rPr sz="1632" b="0" i="0">
-                <a:solidFill>
-                  <a:srgbClr val="E7F0F3"/>
-                </a:solidFill>
-                <a:latin typeface="Arial"/>
-              </a:rPr>
-              <a:t>p∞</a:t>
-            </a:r>
-          </a:p>
-        </p:txBody>
-      </p:sp>
-      <p:sp>
-        <p:nvSpPr>
-          <p:cNvPr id="19" name="text18" descr="sci-ppt:C1-E05-018"/>
-          <p:cNvSpPr txBox="1"/>
-          <p:nvPr/>
-        </p:nvSpPr>
-        <p:spPr>
-          <a:xfrm>
-            <a:off x="6156960" y="5266944"/>
-            <a:ext cx="5547360" cy="321259"/>
-          </a:xfrm>
-          <a:prstGeom prst="rect">
-            <a:avLst/>
-          </a:prstGeom>
-          <a:noFill/>
-          <a:effectLst/>
-        </p:spPr>
-        <p:txBody>
-          <a:bodyPr wrap="none" lIns="27432" rIns="27432" tIns="18288" bIns="18288" anchor="ctr">
-            <a:spAutoFit/>
-          </a:bodyPr>
-          <a:lstStyle/>
-          <a:p>
-            <a:pPr algn="l">
-              <a:spcAft>
-                <a:spcPts val="0"/>
-              </a:spcAft>
-            </a:pPr>
-            <a:r>
-              <a:rPr sz="1632" b="0" i="0">
-                <a:solidFill>
-                  <a:srgbClr val="E7F0F3"/>
-                </a:solidFill>
-                <a:latin typeface="Arial"/>
-              </a:rPr>
-              <a:t>φ</a:t>
-            </a:r>
-          </a:p>
-        </p:txBody>
-      </p:sp>
-      <p:sp>
-        <p:nvSpPr>
-          <p:cNvPr id="20" name="text19" descr="sci-ppt:C1-E05-019"/>
-          <p:cNvSpPr txBox="1"/>
-          <p:nvPr/>
-        </p:nvSpPr>
-        <p:spPr>
-          <a:xfrm>
-            <a:off x="6156960" y="5559552"/>
-            <a:ext cx="5547360" cy="321259"/>
-          </a:xfrm>
-          <a:prstGeom prst="rect">
-            <a:avLst/>
-          </a:prstGeom>
-          <a:noFill/>
-          <a:effectLst/>
-        </p:spPr>
-        <p:txBody>
-          <a:bodyPr wrap="none" lIns="27432" rIns="27432" tIns="18288" bIns="18288" anchor="ctr">
-            <a:spAutoFit/>
-          </a:bodyPr>
-          <a:lstStyle/>
-          <a:p>
-            <a:pPr algn="l">
-              <a:spcAft>
-                <a:spcPts val="0"/>
-              </a:spcAft>
-            </a:pPr>
-            <a:r>
-              <a:rPr sz="1632" b="0" i="0">
-                <a:solidFill>
-                  <a:srgbClr val="E7F0F3"/>
-                </a:solidFill>
-                <a:latin typeface="Arial"/>
-              </a:rPr>
-              <a:t>R̈</a:t>
-            </a:r>
-          </a:p>
-        </p:txBody>
-      </p:sp>
-      <p:sp>
-        <p:nvSpPr>
-          <p:cNvPr id="21" name="text20" descr="sci-ppt:C1-E05-020"/>
-          <p:cNvSpPr txBox="1"/>
-          <p:nvPr/>
-        </p:nvSpPr>
-        <p:spPr>
-          <a:xfrm>
-            <a:off x="6156960" y="5852160"/>
-            <a:ext cx="5547360" cy="321259"/>
-          </a:xfrm>
-          <a:prstGeom prst="rect">
-            <a:avLst/>
-          </a:prstGeom>
-          <a:noFill/>
-          <a:effectLst/>
-        </p:spPr>
-        <p:txBody>
-          <a:bodyPr wrap="none" lIns="27432" rIns="27432" tIns="18288" bIns="18288" anchor="ctr">
-            <a:spAutoFit/>
-          </a:bodyPr>
-          <a:lstStyle/>
-          <a:p>
-            <a:pPr algn="l">
-              <a:spcAft>
-                <a:spcPts val="0"/>
-              </a:spcAft>
-            </a:pPr>
-            <a:r>
-              <a:rPr sz="1632" b="0" i="0">
-                <a:solidFill>
-                  <a:srgbClr val="E7F0F3"/>
-                </a:solidFill>
-                <a:latin typeface="Arial"/>
-              </a:rPr>
-              <a:t>t</a:t>
-            </a:r>
-          </a:p>
-        </p:txBody>
-      </p:sp>
-      <p:sp>
-        <p:nvSpPr>
-          <p:cNvPr id="22" name="text21" descr="sci-ppt:C1-E05-021"/>
-          <p:cNvSpPr txBox="1"/>
-          <p:nvPr/>
-        </p:nvSpPr>
-        <p:spPr>
-          <a:xfrm>
-            <a:off x="365760" y="6339840"/>
-            <a:ext cx="11277600" cy="302361"/>
-          </a:xfrm>
-          <a:prstGeom prst="rect">
-            <a:avLst/>
-          </a:prstGeom>
-          <a:noFill/>
-          <a:effectLst/>
-        </p:spPr>
-        <p:txBody>
-          <a:bodyPr wrap="none" lIns="27432" rIns="27432" tIns="18288" bIns="18288" anchor="ctr">
-            <a:spAutoFit/>
-          </a:bodyPr>
-          <a:lstStyle/>
-          <a:p>
-            <a:pPr algn="l">
-              <a:spcAft>
-                <a:spcPts val="0"/>
-              </a:spcAft>
-            </a:pPr>
-            <a:r>
-              <a:rPr sz="1536" b="0" i="0">
+              <a:rPr sz="1000" b="0" i="0">
                 <a:solidFill>
                   <a:srgbClr val="B4C7D2"/>
                 </a:solidFill>
                 <a:latin typeface="Arial"/>
               </a:rPr>
-              <a:t>R R̈ and 3Ṙ²/2 each have units m²/s²</a:t>
+              <a:t>Profile: p − p∞ = ρ[(R²R̈ + 2RṘ²)/r − R⁴Ṙ²/(2r⁴)] from the unsteady Bernoulli equation, R = 1.</a:t>
             </a:r>
           </a:p>
         </p:txBody>
